--- a/ptc_art/PTC_Sunum_Karsilastirma.pptx
+++ b/ptc_art/PTC_Sunum_Karsilastirma.pptx
@@ -11843,7 +11843,7 @@
                 <a:ea typeface="Inter" pitchFamily="34" charset="-122"/>
                 <a:cs typeface="Inter" pitchFamily="34" charset="-120"/>
               </a:rPr>
-              <a:t>209 test · 51/51 (`proxy`) + 52/52 (`direct`) canlı kabul kontrolü · bütün ölçümler cluster'dan.</a:t>
+              <a:t>209 test · 52/52 (`proxy`) + 53/53 (`direct`) canlı kabul kontrolü · bütün ölçümler cluster'dan.</a:t>
             </a:r>
             <a:endParaRPr lang="en-US" sz="1300" dirty="0"/>
           </a:p>
@@ -18449,6 +18449,20 @@
                         </a:rPr>
                         <a:t>sandbox → minio</a:t>
                       </a:r>
+                      <a:pPr indent="0" marL="0">
+                        <a:buNone/>
+                      </a:pPr>
+                      <a:r>
+                        <a:rPr lang="en-US" sz="1150" dirty="0">
+                          <a:solidFill>
+                            <a:srgbClr val="1D1D1F"/>
+                          </a:solidFill>
+                          <a:latin typeface="Inter" pitchFamily="34" charset="0"/>
+                          <a:ea typeface="Inter" pitchFamily="34" charset="-122"/>
+                          <a:cs typeface="Inter" pitchFamily="34" charset="-120"/>
+                        </a:rPr>
+                        <a:t> (IP ile)</a:t>
+                      </a:r>
                       <a:endParaRPr lang="en-US" sz="1150" dirty="0">
                         <a:latin typeface="Inter" charset="0"/>
                         <a:ea typeface="Inter" charset="0"/>
@@ -18515,7 +18529,7 @@
                           <a:ea typeface="Inter" pitchFamily="34" charset="-122"/>
                           <a:cs typeface="Inter" pitchFamily="34" charset="-120"/>
                         </a:rPr>
-                        <a:t>gaierror</a:t>
+                        <a:t>TimeoutError</a:t>
                       </a:r>
                       <a:endParaRPr lang="en-US" sz="1150" dirty="0">
                         <a:latin typeface="Inter" charset="0"/>
@@ -18583,7 +18597,7 @@
                           <a:ea typeface="Inter" pitchFamily="34" charset="-122"/>
                           <a:cs typeface="Inter" pitchFamily="34" charset="-120"/>
                         </a:rPr>
-                        <a:t>ULASTI</a:t>
+                        <a:t>ULASILDI</a:t>
                       </a:r>
                       <a:endParaRPr lang="en-US" sz="1150" dirty="0">
                         <a:latin typeface="Inter" charset="0"/>

--- a/ptc_art/PTC_Sunum_Karsilastirma.pptx
+++ b/ptc_art/PTC_Sunum_Karsilastirma.pptx
@@ -20,9 +20,11 @@
     <p:sldId id="268" r:id="rId14"/>
     <p:sldId id="269" r:id="rId15"/>
     <p:sldId id="270" r:id="rId16"/>
+    <p:sldId id="271" r:id="rId17"/>
+    <p:sldId id="272" r:id="rId18"/>
   </p:sldIdLst>
   <p:notesMasterIdLst>
-    <p:notesMasterId r:id="rId17"/>
+    <p:notesMasterId r:id="rId19"/>
   </p:notesMasterIdLst>
   <p:sldSz cx="12192000" cy="6858000"/>
   <p:notesSz cx="6858000" cy="12192000"/>
@@ -1068,6 +1070,182 @@
             <a:fld id="{F7021451-1387-4CA6-816F-3879F97B5CBC}" type="slidenum">
               <a:rPr lang="en-US"/>
               <a:t>15</a:t>
+            </a:fld>
+            <a:endParaRPr lang="en-US"/>
+          </a:p>
+        </p:txBody>
+      </p:sp>
+    </p:spTree>
+    <p:extLst>
+      <p:ext uri="{BB962C8B-B14F-4D97-AF65-F5344CB8AC3E}">
+        <p14:creationId xmlns:p14="http://schemas.microsoft.com/office/powerpoint/2010/main" val="1024086991"/>
+      </p:ext>
+    </p:extLst>
+  </p:cSld>
+  <p:clrMapOvr>
+    <a:masterClrMapping/>
+  </p:clrMapOvr>
+</p:notes>
+</file>
+
+<file path=ppt/notesSlides/notesSlide16.xml><?xml version="1.0" encoding="utf-8"?>
+<p:notes xmlns:a="http://schemas.openxmlformats.org/drawingml/2006/main" xmlns:r="http://schemas.openxmlformats.org/officeDocument/2006/relationships" xmlns:p="http://schemas.openxmlformats.org/presentationml/2006/main">
+  <p:cSld>
+    <p:spTree>
+      <p:nvGrpSpPr>
+        <p:cNvPr id="1" name=""/>
+        <p:cNvGrpSpPr/>
+        <p:nvPr/>
+      </p:nvGrpSpPr>
+      <p:grpSpPr>
+        <a:xfrm>
+          <a:off x="0" y="0"/>
+          <a:ext cx="0" cy="0"/>
+          <a:chOff x="0" y="0"/>
+          <a:chExt cx="0" cy="0"/>
+        </a:xfrm>
+      </p:grpSpPr>
+      <p:sp>
+        <p:nvSpPr>
+          <p:cNvPr id="2" name="Slide Image Placeholder 1"/>
+          <p:cNvSpPr>
+            <a:spLocks noGrp="1" noRot="1" noChangeAspect="1"/>
+          </p:cNvSpPr>
+          <p:nvPr>
+            <p:ph type="sldImg"/>
+          </p:nvPr>
+        </p:nvSpPr>
+        <p:spPr/>
+      </p:sp>
+      <p:sp>
+        <p:nvSpPr>
+          <p:cNvPr id="3" name="Notes Placeholder 2"/>
+          <p:cNvSpPr>
+            <a:spLocks noGrp="1"/>
+          </p:cNvSpPr>
+          <p:nvPr>
+            <p:ph type="body" idx="1"/>
+          </p:nvPr>
+        </p:nvSpPr>
+        <p:spPr/>
+        <p:txBody>
+          <a:bodyPr/>
+          <a:lstStyle/>
+          <a:p>
+            <a:r>
+              <a:rPr lang="en-US" dirty="0"/>
+              <a:t/>
+            </a:r>
+            <a:endParaRPr lang="en-US" dirty="0"/>
+          </a:p>
+        </p:txBody>
+      </p:sp>
+      <p:sp>
+        <p:nvSpPr>
+          <p:cNvPr id="4" name="Slide Number Placeholder 3"/>
+          <p:cNvSpPr>
+            <a:spLocks noGrp="1"/>
+          </p:cNvSpPr>
+          <p:nvPr>
+            <p:ph type="sldNum" sz="quarter" idx="10"/>
+          </p:nvPr>
+        </p:nvSpPr>
+        <p:spPr/>
+        <p:txBody>
+          <a:bodyPr/>
+          <a:lstStyle/>
+          <a:p>
+            <a:fld id="{F7021451-1387-4CA6-816F-3879F97B5CBC}" type="slidenum">
+              <a:rPr lang="en-US"/>
+              <a:t>16</a:t>
+            </a:fld>
+            <a:endParaRPr lang="en-US"/>
+          </a:p>
+        </p:txBody>
+      </p:sp>
+    </p:spTree>
+    <p:extLst>
+      <p:ext uri="{BB962C8B-B14F-4D97-AF65-F5344CB8AC3E}">
+        <p14:creationId xmlns:p14="http://schemas.microsoft.com/office/powerpoint/2010/main" val="1024086991"/>
+      </p:ext>
+    </p:extLst>
+  </p:cSld>
+  <p:clrMapOvr>
+    <a:masterClrMapping/>
+  </p:clrMapOvr>
+</p:notes>
+</file>
+
+<file path=ppt/notesSlides/notesSlide17.xml><?xml version="1.0" encoding="utf-8"?>
+<p:notes xmlns:a="http://schemas.openxmlformats.org/drawingml/2006/main" xmlns:r="http://schemas.openxmlformats.org/officeDocument/2006/relationships" xmlns:p="http://schemas.openxmlformats.org/presentationml/2006/main">
+  <p:cSld>
+    <p:spTree>
+      <p:nvGrpSpPr>
+        <p:cNvPr id="1" name=""/>
+        <p:cNvGrpSpPr/>
+        <p:nvPr/>
+      </p:nvGrpSpPr>
+      <p:grpSpPr>
+        <a:xfrm>
+          <a:off x="0" y="0"/>
+          <a:ext cx="0" cy="0"/>
+          <a:chOff x="0" y="0"/>
+          <a:chExt cx="0" cy="0"/>
+        </a:xfrm>
+      </p:grpSpPr>
+      <p:sp>
+        <p:nvSpPr>
+          <p:cNvPr id="2" name="Slide Image Placeholder 1"/>
+          <p:cNvSpPr>
+            <a:spLocks noGrp="1" noRot="1" noChangeAspect="1"/>
+          </p:cNvSpPr>
+          <p:nvPr>
+            <p:ph type="sldImg"/>
+          </p:nvPr>
+        </p:nvSpPr>
+        <p:spPr/>
+      </p:sp>
+      <p:sp>
+        <p:nvSpPr>
+          <p:cNvPr id="3" name="Notes Placeholder 2"/>
+          <p:cNvSpPr>
+            <a:spLocks noGrp="1"/>
+          </p:cNvSpPr>
+          <p:nvPr>
+            <p:ph type="body" idx="1"/>
+          </p:nvPr>
+        </p:nvSpPr>
+        <p:spPr/>
+        <p:txBody>
+          <a:bodyPr/>
+          <a:lstStyle/>
+          <a:p>
+            <a:r>
+              <a:rPr lang="en-US" dirty="0"/>
+              <a:t/>
+            </a:r>
+            <a:endParaRPr lang="en-US" dirty="0"/>
+          </a:p>
+        </p:txBody>
+      </p:sp>
+      <p:sp>
+        <p:nvSpPr>
+          <p:cNvPr id="4" name="Slide Number Placeholder 3"/>
+          <p:cNvSpPr>
+            <a:spLocks noGrp="1"/>
+          </p:cNvSpPr>
+          <p:nvPr>
+            <p:ph type="sldNum" sz="quarter" idx="10"/>
+          </p:nvPr>
+        </p:nvSpPr>
+        <p:spPr/>
+        <p:txBody>
+          <a:bodyPr/>
+          <a:lstStyle/>
+          <a:p>
+            <a:fld id="{F7021451-1387-4CA6-816F-3879F97B5CBC}" type="slidenum">
+              <a:rPr lang="en-US"/>
+              <a:t>17</a:t>
             </a:fld>
             <a:endParaRPr lang="en-US"/>
           </a:p>
@@ -2334,7 +2512,7 @@
                 <a:ea typeface="JetBrains Mono" pitchFamily="34" charset="-122"/>
                 <a:cs typeface="JetBrains Mono" pitchFamily="34" charset="-120"/>
               </a:rPr>
-              <a:t>2026-09-07  ·  12 sayfa  ·  bütün ölçümler canlı cluster'dan</a:t>
+              <a:t>2026-09-07  ·  13 sayfa  ·  bütün ölçümler canlı cluster'dan</a:t>
             </a:r>
             <a:endParaRPr lang="en-US" sz="1100" dirty="0"/>
           </a:p>
@@ -3972,7 +4150,7 @@
                 <a:ea typeface="JetBrains Mono" pitchFamily="34" charset="-122"/>
                 <a:cs typeface="JetBrains Mono" pitchFamily="34" charset="-120"/>
               </a:rPr>
-              <a:t>7 / 12</a:t>
+              <a:t>7 / 13</a:t>
             </a:r>
             <a:endParaRPr lang="en-US" sz="900" dirty="0"/>
           </a:p>
@@ -6114,7 +6292,7 @@
                 <a:ea typeface="JetBrains Mono" pitchFamily="34" charset="-122"/>
                 <a:cs typeface="JetBrains Mono" pitchFamily="34" charset="-120"/>
               </a:rPr>
-              <a:t>8 / 12</a:t>
+              <a:t>8 / 13</a:t>
             </a:r>
             <a:endParaRPr lang="en-US" sz="900" dirty="0"/>
           </a:p>
@@ -8680,7 +8858,7 @@
                 <a:ea typeface="JetBrains Mono" pitchFamily="34" charset="-122"/>
                 <a:cs typeface="JetBrains Mono" pitchFamily="34" charset="-120"/>
               </a:rPr>
-              <a:t>9 / 12</a:t>
+              <a:t>9 / 13</a:t>
             </a:r>
             <a:endParaRPr lang="en-US" sz="900" dirty="0"/>
           </a:p>
@@ -8790,7 +8968,530 @@
                 <a:ea typeface="Inter" pitchFamily="34" charset="-122"/>
                 <a:cs typeface="Inter" pitchFamily="34" charset="-120"/>
               </a:rPr>
-              <a:t>Biz neredeyiz</a:t>
+              <a:t>Hata kurtarma: sinyali zenginleştirdik</a:t>
+            </a:r>
+            <a:endParaRPr lang="en-US" sz="2700" dirty="0"/>
+          </a:p>
+        </p:txBody>
+      </p:sp>
+      <p:sp>
+        <p:nvSpPr>
+          <p:cNvPr id="4" name="Shape 2"/>
+          <p:cNvSpPr/>
+          <p:nvPr/>
+        </p:nvSpPr>
+        <p:spPr>
+          <a:xfrm>
+            <a:off x="566928" y="1005840"/>
+            <a:ext cx="1371600" cy="25603"/>
+          </a:xfrm>
+          <a:prstGeom prst="rect">
+            <a:avLst/>
+          </a:prstGeom>
+          <a:solidFill>
+            <a:srgbClr val="0071E3"/>
+          </a:solidFill>
+          <a:ln/>
+        </p:spPr>
+      </p:sp>
+      <p:sp>
+        <p:nvSpPr>
+          <p:cNvPr id="5" name="Shape 3"/>
+          <p:cNvSpPr/>
+          <p:nvPr/>
+        </p:nvSpPr>
+        <p:spPr>
+          <a:xfrm>
+            <a:off x="566928" y="1225296"/>
+            <a:ext cx="11057839" cy="448056"/>
+          </a:xfrm>
+          <a:prstGeom prst="rect">
+            <a:avLst/>
+          </a:prstGeom>
+          <a:solidFill>
+            <a:srgbClr val="E8F1FD"/>
+          </a:solidFill>
+          <a:ln/>
+        </p:spPr>
+      </p:sp>
+      <p:sp>
+        <p:nvSpPr>
+          <p:cNvPr id="6" name="Text 4"/>
+          <p:cNvSpPr/>
+          <p:nvPr/>
+        </p:nvSpPr>
+        <p:spPr>
+          <a:xfrm>
+            <a:off x="713232" y="1280160"/>
+            <a:ext cx="10765231" cy="320040"/>
+          </a:xfrm>
+          <a:prstGeom prst="rect">
+            <a:avLst/>
+          </a:prstGeom>
+          <a:noFill/>
+          <a:ln/>
+        </p:spPr>
+        <p:txBody>
+          <a:bodyPr wrap="square" rtlCol="0" anchor="ctr"/>
+          <a:lstStyle/>
+          <a:p>
+            <a:pPr indent="0" marL="0">
+              <a:buNone/>
+            </a:pPr>
+            <a:r>
+              <a:rPr lang="en-US" sz="1300" b="1" dirty="0">
+                <a:solidFill>
+                  <a:srgbClr val="1D1D1F"/>
+                </a:solidFill>
+                <a:latin typeface="Inter" pitchFamily="34" charset="0"/>
+                <a:ea typeface="Inter" pitchFamily="34" charset="-122"/>
+                <a:cs typeface="Inter" pitchFamily="34" charset="-120"/>
+              </a:rPr>
+              <a:t>Sandbox patlayınca modele giden metin. Önce ve sonra:</a:t>
+            </a:r>
+            <a:endParaRPr lang="en-US" sz="1300" dirty="0"/>
+          </a:p>
+        </p:txBody>
+      </p:sp>
+      <p:sp>
+        <p:nvSpPr>
+          <p:cNvPr id="7" name="Shape 5"/>
+          <p:cNvSpPr/>
+          <p:nvPr/>
+        </p:nvSpPr>
+        <p:spPr>
+          <a:xfrm>
+            <a:off x="566928" y="1837944"/>
+            <a:ext cx="11057839" cy="2203704"/>
+          </a:xfrm>
+          <a:prstGeom prst="rect">
+            <a:avLst/>
+          </a:prstGeom>
+          <a:solidFill>
+            <a:srgbClr val="F5F5F7"/>
+          </a:solidFill>
+          <a:ln w="6350">
+            <a:solidFill>
+              <a:srgbClr val="D8D8DC"/>
+            </a:solidFill>
+            <a:prstDash val="solid"/>
+          </a:ln>
+        </p:spPr>
+      </p:sp>
+      <p:sp>
+        <p:nvSpPr>
+          <p:cNvPr id="8" name="Text 6"/>
+          <p:cNvSpPr/>
+          <p:nvPr/>
+        </p:nvSpPr>
+        <p:spPr>
+          <a:xfrm>
+            <a:off x="694944" y="1929384"/>
+            <a:ext cx="10801807" cy="2020824"/>
+          </a:xfrm>
+          <a:prstGeom prst="rect">
+            <a:avLst/>
+          </a:prstGeom>
+          <a:noFill/>
+          <a:ln/>
+        </p:spPr>
+        <p:txBody>
+          <a:bodyPr wrap="square" rtlCol="0" anchor="ctr"/>
+          <a:lstStyle/>
+          <a:p>
+            <a:pPr indent="0" marL="0">
+              <a:lnSpc>
+                <a:spcPct val="110000"/>
+              </a:lnSpc>
+              <a:buNone/>
+            </a:pPr>
+            <a:r>
+              <a:rPr lang="en-US" sz="1000" dirty="0">
+                <a:solidFill>
+                  <a:srgbClr val="1D1D1F"/>
+                </a:solidFill>
+                <a:latin typeface="JetBrains Mono" pitchFamily="34" charset="0"/>
+                <a:ea typeface="JetBrains Mono" pitchFamily="34" charset="-122"/>
+                <a:cs typeface="JetBrains Mono" pitchFamily="34" charset="-120"/>
+              </a:rPr>
+              <a:t>ÖNCE   Hata: 'yok'          ← tip yok, satır yok, stdout yok</a:t>
+            </a:r>
+            <a:endParaRPr lang="en-US" sz="1000" dirty="0"/>
+          </a:p>
+          <a:p>
+            <a:pPr indent="0" marL="0">
+              <a:lnSpc>
+                <a:spcPct val="110000"/>
+              </a:lnSpc>
+              <a:buNone/>
+            </a:pPr>
+            <a:r>
+              <a:rPr lang="en-US" sz="1000" dirty="0">
+                <a:solidFill>
+                  <a:srgbClr val="1D1D1F"/>
+                </a:solidFill>
+                <a:latin typeface="JetBrains Mono" pitchFamily="34" charset="0"/>
+                <a:ea typeface="JetBrains Mono" pitchFamily="34" charset="-122"/>
+                <a:cs typeface="JetBrains Mono" pitchFamily="34" charset="-120"/>
+              </a:rPr>
+              <a:t>       Tahmini bir değer üretme.        ← modele DUR diyor</a:t>
+            </a:r>
+            <a:endParaRPr lang="en-US" sz="1000" dirty="0"/>
+          </a:p>
+          <a:p>
+            <a:pPr indent="0" marL="0">
+              <a:lnSpc>
+                <a:spcPct val="110000"/>
+              </a:lnSpc>
+              <a:buNone/>
+            </a:pPr>
+            <a:endParaRPr lang="en-US" sz="1000" dirty="0"/>
+          </a:p>
+          <a:p>
+            <a:pPr indent="0" marL="0">
+              <a:lnSpc>
+                <a:spcPct val="110000"/>
+              </a:lnSpc>
+              <a:buNone/>
+            </a:pPr>
+            <a:r>
+              <a:rPr lang="en-US" sz="1000" dirty="0">
+                <a:solidFill>
+                  <a:srgbClr val="1D1D1F"/>
+                </a:solidFill>
+                <a:latin typeface="JetBrains Mono" pitchFamily="34" charset="0"/>
+                <a:ea typeface="JetBrains Mono" pitchFamily="34" charset="-122"/>
+                <a:cs typeface="JetBrains Mono" pitchFamily="34" charset="-120"/>
+              </a:rPr>
+              <a:t>SONRA  File "/sandbox/code.py", line 6, in ic</a:t>
+            </a:r>
+            <a:endParaRPr lang="en-US" sz="1000" dirty="0"/>
+          </a:p>
+          <a:p>
+            <a:pPr indent="0" marL="0">
+              <a:lnSpc>
+                <a:spcPct val="110000"/>
+              </a:lnSpc>
+              <a:buNone/>
+            </a:pPr>
+            <a:r>
+              <a:rPr lang="en-US" sz="1000" dirty="0">
+                <a:solidFill>
+                  <a:srgbClr val="1D1D1F"/>
+                </a:solidFill>
+                <a:latin typeface="JetBrains Mono" pitchFamily="34" charset="0"/>
+                <a:ea typeface="JetBrains Mono" pitchFamily="34" charset="-122"/>
+                <a:cs typeface="JetBrains Mono" pitchFamily="34" charset="-120"/>
+              </a:rPr>
+              <a:t>           def ic(): return d["yok"]</a:t>
+            </a:r>
+            <a:endParaRPr lang="en-US" sz="1000" dirty="0"/>
+          </a:p>
+          <a:p>
+            <a:pPr indent="0" marL="0">
+              <a:lnSpc>
+                <a:spcPct val="110000"/>
+              </a:lnSpc>
+              <a:buNone/>
+            </a:pPr>
+            <a:r>
+              <a:rPr lang="en-US" sz="1000" dirty="0">
+                <a:solidFill>
+                  <a:srgbClr val="1D1D1F"/>
+                </a:solidFill>
+                <a:latin typeface="JetBrains Mono" pitchFamily="34" charset="0"/>
+                <a:ea typeface="JetBrains Mono" pitchFamily="34" charset="-122"/>
+                <a:cs typeface="JetBrains Mono" pitchFamily="34" charset="-120"/>
+              </a:rPr>
+              <a:t>                            ~^^^^^^^</a:t>
+            </a:r>
+            <a:endParaRPr lang="en-US" sz="1000" dirty="0"/>
+          </a:p>
+          <a:p>
+            <a:pPr indent="0" marL="0">
+              <a:lnSpc>
+                <a:spcPct val="110000"/>
+              </a:lnSpc>
+              <a:buNone/>
+            </a:pPr>
+            <a:r>
+              <a:rPr lang="en-US" sz="1000" dirty="0">
+                <a:solidFill>
+                  <a:srgbClr val="1D1D1F"/>
+                </a:solidFill>
+                <a:latin typeface="JetBrains Mono" pitchFamily="34" charset="0"/>
+                <a:ea typeface="JetBrains Mono" pitchFamily="34" charset="-122"/>
+                <a:cs typeface="JetBrains Mono" pitchFamily="34" charset="-120"/>
+              </a:rPr>
+              <a:t>       KeyError: 'yok'                  ← tip + satır + ifade</a:t>
+            </a:r>
+            <a:endParaRPr lang="en-US" sz="1000" dirty="0"/>
+          </a:p>
+          <a:p>
+            <a:pPr indent="0" marL="0">
+              <a:lnSpc>
+                <a:spcPct val="110000"/>
+              </a:lnSpc>
+              <a:buNone/>
+            </a:pPr>
+            <a:r>
+              <a:rPr lang="en-US" sz="1000" dirty="0">
+                <a:solidFill>
+                  <a:srgbClr val="1D1D1F"/>
+                </a:solidFill>
+                <a:latin typeface="JetBrains Mono" pitchFamily="34" charset="0"/>
+                <a:ea typeface="JetBrains Mono" pitchFamily="34" charset="-122"/>
+                <a:cs typeface="JetBrains Mono" pitchFamily="34" charset="-120"/>
+              </a:rPr>
+              <a:t>       Hata anına kadar yazılan çıktı:</a:t>
+            </a:r>
+            <a:endParaRPr lang="en-US" sz="1000" dirty="0"/>
+          </a:p>
+          <a:p>
+            <a:pPr indent="0" marL="0">
+              <a:lnSpc>
+                <a:spcPct val="110000"/>
+              </a:lnSpc>
+              <a:buNone/>
+            </a:pPr>
+            <a:r>
+              <a:rPr lang="en-US" sz="1000" dirty="0">
+                <a:solidFill>
+                  <a:srgbClr val="1D1D1F"/>
+                </a:solidFill>
+                <a:latin typeface="JetBrains Mono" pitchFamily="34" charset="0"/>
+                <a:ea typeface="JetBrains Mono" pitchFamily="34" charset="-122"/>
+                <a:cs typeface="JetBrains Mono" pitchFamily="34" charset="-120"/>
+              </a:rPr>
+              <a:t>       adim 1: veri yuklendi            ← print'ler korunuyor</a:t>
+            </a:r>
+            <a:endParaRPr lang="en-US" sz="1000" dirty="0"/>
+          </a:p>
+          <a:p>
+            <a:pPr indent="0" marL="0">
+              <a:lnSpc>
+                <a:spcPct val="110000"/>
+              </a:lnSpc>
+              <a:buNone/>
+            </a:pPr>
+            <a:r>
+              <a:rPr lang="en-US" sz="1000" dirty="0">
+                <a:solidFill>
+                  <a:srgbClr val="1D1D1F"/>
+                </a:solidFill>
+                <a:latin typeface="JetBrains Mono" pitchFamily="34" charset="0"/>
+                <a:ea typeface="JetBrains Mono" pitchFamily="34" charset="-122"/>
+                <a:cs typeface="JetBrains Mono" pitchFamily="34" charset="-120"/>
+              </a:rPr>
+              <a:t>       Hatayı düzeltip TEKRAR çalıştır. Aynı kodu aynen gönderme…</a:t>
+            </a:r>
+            <a:endParaRPr lang="en-US" sz="1000" dirty="0"/>
+          </a:p>
+        </p:txBody>
+      </p:sp>
+      <p:sp>
+        <p:nvSpPr>
+          <p:cNvPr id="9" name="Shape 7"/>
+          <p:cNvSpPr/>
+          <p:nvPr/>
+        </p:nvSpPr>
+        <p:spPr>
+          <a:xfrm>
+            <a:off x="0" y="0"/>
+            <a:ext cx="12191695" cy="50292"/>
+          </a:xfrm>
+          <a:prstGeom prst="rect">
+            <a:avLst/>
+          </a:prstGeom>
+          <a:solidFill>
+            <a:srgbClr val="0071E3"/>
+          </a:solidFill>
+          <a:ln/>
+        </p:spPr>
+      </p:sp>
+      <p:sp>
+        <p:nvSpPr>
+          <p:cNvPr id="10" name="Text 8"/>
+          <p:cNvSpPr/>
+          <p:nvPr/>
+        </p:nvSpPr>
+        <p:spPr>
+          <a:xfrm>
+            <a:off x="566928" y="6455664"/>
+            <a:ext cx="5486400" cy="256032"/>
+          </a:xfrm>
+          <a:prstGeom prst="rect">
+            <a:avLst/>
+          </a:prstGeom>
+          <a:noFill/>
+          <a:ln/>
+        </p:spPr>
+        <p:txBody>
+          <a:bodyPr wrap="square" rtlCol="0" anchor="ctr"/>
+          <a:lstStyle/>
+          <a:p>
+            <a:pPr indent="0" marL="0">
+              <a:buNone/>
+            </a:pPr>
+            <a:r>
+              <a:rPr lang="en-US" sz="900" dirty="0">
+                <a:solidFill>
+                  <a:srgbClr val="6E6E73"/>
+                </a:solidFill>
+                <a:latin typeface="Inter" pitchFamily="34" charset="0"/>
+                <a:ea typeface="Inter" pitchFamily="34" charset="-122"/>
+                <a:cs typeface="Inter" pitchFamily="34" charset="-120"/>
+              </a:rPr>
+              <a:t>PTC · Artifact Persistence</a:t>
+            </a:r>
+            <a:endParaRPr lang="en-US" sz="900" dirty="0"/>
+          </a:p>
+        </p:txBody>
+      </p:sp>
+      <p:sp>
+        <p:nvSpPr>
+          <p:cNvPr id="11" name="Text 9"/>
+          <p:cNvSpPr/>
+          <p:nvPr/>
+        </p:nvSpPr>
+        <p:spPr>
+          <a:xfrm>
+            <a:off x="10527487" y="6455664"/>
+            <a:ext cx="1097280" cy="256032"/>
+          </a:xfrm>
+          <a:prstGeom prst="rect">
+            <a:avLst/>
+          </a:prstGeom>
+          <a:noFill/>
+          <a:ln/>
+        </p:spPr>
+        <p:txBody>
+          <a:bodyPr wrap="square" rtlCol="0" anchor="ctr"/>
+          <a:lstStyle/>
+          <a:p>
+            <a:pPr algn="r" indent="0" marL="0">
+              <a:buNone/>
+            </a:pPr>
+            <a:r>
+              <a:rPr lang="en-US" sz="900" dirty="0">
+                <a:solidFill>
+                  <a:srgbClr val="6E6E73"/>
+                </a:solidFill>
+                <a:latin typeface="JetBrains Mono" pitchFamily="34" charset="0"/>
+                <a:ea typeface="JetBrains Mono" pitchFamily="34" charset="-122"/>
+                <a:cs typeface="JetBrains Mono" pitchFamily="34" charset="-120"/>
+              </a:rPr>
+              <a:t>10 / 13</a:t>
+            </a:r>
+            <a:endParaRPr lang="en-US" sz="900" dirty="0"/>
+          </a:p>
+        </p:txBody>
+      </p:sp>
+    </p:spTree>
+  </p:cSld>
+  <p:clrMapOvr>
+    <a:masterClrMapping/>
+  </p:clrMapOvr>
+</p:sld>
+</file>
+
+<file path=ppt/slides/slide14.xml><?xml version="1.0" encoding="utf-8"?>
+<p:sld xmlns:a="http://schemas.openxmlformats.org/drawingml/2006/main" xmlns:r="http://schemas.openxmlformats.org/officeDocument/2006/relationships" xmlns:p="http://schemas.openxmlformats.org/presentationml/2006/main">
+  <p:cSld name="Slide 14">
+    <p:bg>
+      <p:bgPr>
+        <a:solidFill>
+          <a:srgbClr val="FFFFFF"/>
+        </a:solidFill>
+      </p:bgPr>
+    </p:bg>
+    <p:spTree>
+      <p:nvGrpSpPr>
+        <p:cNvPr id="1" name=""/>
+        <p:cNvGrpSpPr/>
+        <p:nvPr/>
+      </p:nvGrpSpPr>
+      <p:grpSpPr>
+        <a:xfrm>
+          <a:off x="0" y="0"/>
+          <a:ext cx="0" cy="0"/>
+          <a:chOff x="0" y="0"/>
+          <a:chExt cx="0" cy="0"/>
+        </a:xfrm>
+      </p:grpSpPr>
+      <p:sp>
+        <p:nvSpPr>
+          <p:cNvPr id="2" name="Text 0"/>
+          <p:cNvSpPr/>
+          <p:nvPr/>
+        </p:nvSpPr>
+        <p:spPr>
+          <a:xfrm>
+            <a:off x="566928" y="256032"/>
+            <a:ext cx="3108960" cy="219456"/>
+          </a:xfrm>
+          <a:prstGeom prst="rect">
+            <a:avLst/>
+          </a:prstGeom>
+          <a:noFill/>
+          <a:ln/>
+        </p:spPr>
+        <p:txBody>
+          <a:bodyPr wrap="square" rtlCol="0" anchor="ctr"/>
+          <a:lstStyle/>
+          <a:p>
+            <a:pPr indent="0" marL="0">
+              <a:buNone/>
+            </a:pPr>
+            <a:r>
+              <a:rPr lang="en-US" sz="950" b="1" spc="160" kern="0" dirty="0">
+                <a:solidFill>
+                  <a:srgbClr val="0071E3"/>
+                </a:solidFill>
+                <a:latin typeface="Inter" pitchFamily="34" charset="0"/>
+                <a:ea typeface="Inter" pitchFamily="34" charset="-122"/>
+                <a:cs typeface="Inter" pitchFamily="34" charset="-120"/>
+              </a:rPr>
+              <a:t>SAYFA 10 · devam</a:t>
+            </a:r>
+            <a:endParaRPr lang="en-US" sz="950" dirty="0"/>
+          </a:p>
+        </p:txBody>
+      </p:sp>
+      <p:sp>
+        <p:nvSpPr>
+          <p:cNvPr id="3" name="Text 1"/>
+          <p:cNvSpPr/>
+          <p:nvPr/>
+        </p:nvSpPr>
+        <p:spPr>
+          <a:xfrm>
+            <a:off x="566928" y="475488"/>
+            <a:ext cx="11057839" cy="512064"/>
+          </a:xfrm>
+          <a:prstGeom prst="rect">
+            <a:avLst/>
+          </a:prstGeom>
+          <a:noFill/>
+          <a:ln/>
+        </p:spPr>
+        <p:txBody>
+          <a:bodyPr wrap="square" rtlCol="0" anchor="ctr"/>
+          <a:lstStyle/>
+          <a:p>
+            <a:pPr indent="0" marL="0">
+              <a:buNone/>
+            </a:pPr>
+            <a:r>
+              <a:rPr lang="en-US" sz="2700" b="1" spc="-40" kern="0" dirty="0">
+                <a:solidFill>
+                  <a:srgbClr val="1D1D1F"/>
+                </a:solidFill>
+                <a:latin typeface="Inter" pitchFamily="34" charset="0"/>
+                <a:ea typeface="Inter" pitchFamily="34" charset="-122"/>
+                <a:cs typeface="Inter" pitchFamily="34" charset="-120"/>
+              </a:rPr>
+              <a:t>Hata kurtarma: sinyali zenginleştirdik</a:t>
             </a:r>
             <a:endParaRPr lang="en-US" sz="2700" dirty="0"/>
           </a:p>
@@ -8818,7 +9519,7 @@
       </p:sp>
       <p:graphicFrame>
         <p:nvGraphicFramePr>
-          <p:cNvPr id="14" name="Table 0"/>
+          <p:cNvPr id="15" name="Table 0"/>
           <p:cNvGraphicFramePr>
             <a:graphicFrameLocks noGrp="1"/>
           </p:cNvGraphicFramePr>
@@ -8928,7 +9629,7 @@
                           <a:ea typeface="Inter" pitchFamily="34" charset="-122"/>
                           <a:cs typeface="Inter" pitchFamily="34" charset="-120"/>
                         </a:rPr>
-                        <a:t>Kimden</a:t>
+                        <a:t>Kimden kopya</a:t>
                       </a:r>
                       <a:endParaRPr lang="en-US" sz="1150" dirty="0">
                         <a:latin typeface="Inter" charset="0"/>
@@ -8998,7 +9699,35 @@
                           <a:ea typeface="Inter" pitchFamily="34" charset="-122"/>
                           <a:cs typeface="Inter" pitchFamily="34" charset="-120"/>
                         </a:rPr>
-                        <a:t>init + wait sidecar</a:t>
+                        <a:t>Yalnızca </a:t>
+                      </a:r>
+                      <a:pPr indent="0" marL="0">
+                        <a:buNone/>
+                      </a:pPr>
+                      <a:r>
+                        <a:rPr lang="en-US" sz="1150" b="1" dirty="0">
+                          <a:solidFill>
+                            <a:srgbClr val="1D1D1F"/>
+                          </a:solidFill>
+                          <a:latin typeface="Inter" pitchFamily="34" charset="0"/>
+                          <a:ea typeface="Inter" pitchFamily="34" charset="-122"/>
+                          <a:cs typeface="Inter" pitchFamily="34" charset="-120"/>
+                        </a:rPr>
+                        <a:t>kullanıcı kodunun</a:t>
+                      </a:r>
+                      <a:pPr indent="0" marL="0">
+                        <a:buNone/>
+                      </a:pPr>
+                      <a:r>
+                        <a:rPr lang="en-US" sz="1150" dirty="0">
+                          <a:solidFill>
+                            <a:srgbClr val="1D1D1F"/>
+                          </a:solidFill>
+                          <a:latin typeface="Inter" pitchFamily="34" charset="0"/>
+                          <a:ea typeface="Inter" pitchFamily="34" charset="-122"/>
+                          <a:cs typeface="Inter" pitchFamily="34" charset="-120"/>
+                        </a:rPr>
+                        <a:t> kareleri</a:t>
                       </a:r>
                       <a:endParaRPr lang="en-US" sz="1150" dirty="0">
                         <a:latin typeface="Inter" charset="0"/>
@@ -9066,7 +9795,21 @@
                           <a:ea typeface="Inter" pitchFamily="34" charset="-122"/>
                           <a:cs typeface="Inter" pitchFamily="34" charset="-120"/>
                         </a:rPr>
-                        <a:t>Argo Workflows</a:t>
+                        <a:t>SWE-agent</a:t>
+                      </a:r>
+                      <a:pPr indent="0" marL="0">
+                        <a:buNone/>
+                      </a:pPr>
+                      <a:r>
+                        <a:rPr lang="en-US" sz="1150" dirty="0">
+                          <a:solidFill>
+                            <a:srgbClr val="1D1D1F"/>
+                          </a:solidFill>
+                          <a:latin typeface="Inter" pitchFamily="34" charset="0"/>
+                          <a:ea typeface="Inter" pitchFamily="34" charset="-122"/>
+                          <a:cs typeface="Inter" pitchFamily="34" charset="-120"/>
+                        </a:rPr>
+                        <a:t> — "tip olmadan model yanlış teşhis koyuyor"</a:t>
                       </a:r>
                       <a:endParaRPr lang="en-US" sz="1150" dirty="0">
                         <a:latin typeface="Inter" charset="0"/>
@@ -9136,7 +9879,21 @@
                           <a:ea typeface="Inter" pitchFamily="34" charset="-122"/>
                           <a:cs typeface="Inter" pitchFamily="34" charset="-120"/>
                         </a:rPr>
-                        <a:t>girdiyi kod başlamadan yerleştir</a:t>
+                        <a:t>Hata anına kadarki </a:t>
+                      </a:r>
+                      <a:pPr indent="0" marL="0">
+                        <a:buNone/>
+                      </a:pPr>
+                      <a:r>
+                        <a:rPr lang="en-US" sz="1150" b="1" dirty="0">
+                          <a:solidFill>
+                            <a:srgbClr val="1D1D1F"/>
+                          </a:solidFill>
+                          <a:latin typeface="Inter" pitchFamily="34" charset="0"/>
+                          <a:ea typeface="Inter" pitchFamily="34" charset="-122"/>
+                          <a:cs typeface="Inter" pitchFamily="34" charset="-120"/>
+                        </a:rPr>
+                        <a:t>stdout</a:t>
                       </a:r>
                       <a:endParaRPr lang="en-US" sz="1150" dirty="0">
                         <a:latin typeface="Inter" charset="0"/>
@@ -9204,7 +9961,21 @@
                           <a:ea typeface="Inter" pitchFamily="34" charset="-122"/>
                           <a:cs typeface="Inter" pitchFamily="34" charset="-120"/>
                         </a:rPr>
-                        <a:t>Argo `init` / KFP `driver`+`launcher`</a:t>
+                        <a:t>smolagents</a:t>
+                      </a:r>
+                      <a:pPr indent="0" marL="0">
+                        <a:buNone/>
+                      </a:pPr>
+                      <a:r>
+                        <a:rPr lang="en-US" sz="1150" dirty="0">
+                          <a:solidFill>
+                            <a:srgbClr val="1D1D1F"/>
+                          </a:solidFill>
+                          <a:latin typeface="Inter" pitchFamily="34" charset="0"/>
+                          <a:ea typeface="Inter" pitchFamily="34" charset="-122"/>
+                          <a:cs typeface="Inter" pitchFamily="34" charset="-120"/>
+                        </a:rPr>
+                        <a:t> — bunun için ayrı testi var</a:t>
                       </a:r>
                       <a:endParaRPr lang="en-US" sz="1150" dirty="0">
                         <a:latin typeface="Inter" charset="0"/>
@@ -9266,7 +10037,7 @@
                         <a:buNone/>
                       </a:pPr>
                       <a:r>
-                        <a:rPr lang="en-US" sz="1150" dirty="0">
+                        <a:rPr lang="en-US" sz="1150" b="1" dirty="0">
                           <a:solidFill>
                             <a:srgbClr val="1D1D1F"/>
                           </a:solidFill>
@@ -9274,7 +10045,21 @@
                           <a:ea typeface="Inter" pitchFamily="34" charset="-122"/>
                           <a:cs typeface="Inter" pitchFamily="34" charset="-120"/>
                         </a:rPr>
-                        <a:t>girdi beyanı · beyandan soy</a:t>
+                        <a:t>20 000 karakterde ortadan</a:t>
+                      </a:r>
+                      <a:pPr indent="0" marL="0">
+                        <a:buNone/>
+                      </a:pPr>
+                      <a:r>
+                        <a:rPr lang="en-US" sz="1150" dirty="0">
+                          <a:solidFill>
+                            <a:srgbClr val="1D1D1F"/>
+                          </a:solidFill>
+                          <a:latin typeface="Inter" pitchFamily="34" charset="0"/>
+                          <a:ea typeface="Inter" pitchFamily="34" charset="-122"/>
+                          <a:cs typeface="Inter" pitchFamily="34" charset="-120"/>
+                        </a:rPr>
+                        <a:t> kırpma</a:t>
                       </a:r>
                       <a:endParaRPr lang="en-US" sz="1150" dirty="0">
                         <a:latin typeface="Inter" charset="0"/>
@@ -9342,7 +10127,7 @@
                           <a:ea typeface="Inter" pitchFamily="34" charset="-122"/>
                           <a:cs typeface="Inter" pitchFamily="34" charset="-120"/>
                         </a:rPr>
-                        <a:t>Argo `inputs.artifacts` · MLMD `DECLARED_INPUT`</a:t>
+                        <a:t>smolagents · Codex</a:t>
                       </a:r>
                       <a:endParaRPr lang="en-US" sz="1150" dirty="0">
                         <a:latin typeface="Inter" charset="0"/>
@@ -9412,7 +10197,49 @@
                           <a:ea typeface="Inter" pitchFamily="34" charset="-122"/>
                           <a:cs typeface="Inter" pitchFamily="34" charset="-120"/>
                         </a:rPr>
-                        <a:t>run-scoped anahtar yolu · kayıt defteri</a:t>
+                        <a:t>Kırpıldığını </a:t>
+                      </a:r>
+                      <a:pPr indent="0" marL="0">
+                        <a:buNone/>
+                      </a:pPr>
+                      <a:r>
+                        <a:rPr lang="en-US" sz="1150" b="1" dirty="0">
+                          <a:solidFill>
+                            <a:srgbClr val="1D1D1F"/>
+                          </a:solidFill>
+                          <a:latin typeface="Inter" pitchFamily="34" charset="0"/>
+                          <a:ea typeface="Inter" pitchFamily="34" charset="-122"/>
+                          <a:cs typeface="Inter" pitchFamily="34" charset="-120"/>
+                        </a:rPr>
+                        <a:t>söyle</a:t>
+                      </a:r>
+                      <a:pPr indent="0" marL="0">
+                        <a:buNone/>
+                      </a:pPr>
+                      <a:r>
+                        <a:rPr lang="en-US" sz="1150" dirty="0">
+                          <a:solidFill>
+                            <a:srgbClr val="1D1D1F"/>
+                          </a:solidFill>
+                          <a:latin typeface="Inter" pitchFamily="34" charset="0"/>
+                          <a:ea typeface="Inter" pitchFamily="34" charset="-122"/>
+                          <a:cs typeface="Inter" pitchFamily="34" charset="-120"/>
+                        </a:rPr>
+                        <a:t> + ne yapacağını </a:t>
+                      </a:r>
+                      <a:pPr indent="0" marL="0">
+                        <a:buNone/>
+                      </a:pPr>
+                      <a:r>
+                        <a:rPr lang="en-US" sz="1150" b="1" dirty="0">
+                          <a:solidFill>
+                            <a:srgbClr val="1D1D1F"/>
+                          </a:solidFill>
+                          <a:latin typeface="Inter" pitchFamily="34" charset="0"/>
+                          <a:ea typeface="Inter" pitchFamily="34" charset="-122"/>
+                          <a:cs typeface="Inter" pitchFamily="34" charset="-120"/>
+                        </a:rPr>
+                        <a:t>öğret</a:t>
                       </a:r>
                       <a:endParaRPr lang="en-US" sz="1150" dirty="0">
                         <a:latin typeface="Inter" charset="0"/>
@@ -9480,7 +10307,7 @@
                           <a:ea typeface="Inter" pitchFamily="34" charset="-122"/>
                           <a:cs typeface="Inter" pitchFamily="34" charset="-120"/>
                         </a:rPr>
-                        <a:t>KFP `pipeline_root` · MLMD</a:t>
+                        <a:t>SWE-agent</a:t>
                       </a:r>
                       <a:endParaRPr lang="en-US" sz="1150" dirty="0">
                         <a:latin typeface="Inter" charset="0"/>
@@ -9550,7 +10377,35 @@
                           <a:ea typeface="Inter" pitchFamily="34" charset="-122"/>
                           <a:cs typeface="Inter" pitchFamily="34" charset="-120"/>
                         </a:rPr>
-                        <a:t>künye süzgeci · sürüm alias'ı</a:t>
+                        <a:t>"tekrar dene" </a:t>
+                      </a:r>
+                      <a:pPr indent="0" marL="0">
+                        <a:buNone/>
+                      </a:pPr>
+                      <a:r>
+                        <a:rPr lang="en-US" sz="1150" b="1" dirty="0">
+                          <a:solidFill>
+                            <a:srgbClr val="1D1D1F"/>
+                          </a:solidFill>
+                          <a:latin typeface="Inter" pitchFamily="34" charset="0"/>
+                          <a:ea typeface="Inter" pitchFamily="34" charset="-122"/>
+                          <a:cs typeface="Inter" pitchFamily="34" charset="-120"/>
+                        </a:rPr>
+                        <a:t>ve</a:t>
+                      </a:r>
+                      <a:pPr indent="0" marL="0">
+                        <a:buNone/>
+                      </a:pPr>
+                      <a:r>
+                        <a:rPr lang="en-US" sz="1150" dirty="0">
+                          <a:solidFill>
+                            <a:srgbClr val="1D1D1F"/>
+                          </a:solidFill>
+                          <a:latin typeface="Inter" pitchFamily="34" charset="0"/>
+                          <a:ea typeface="Inter" pitchFamily="34" charset="-122"/>
+                          <a:cs typeface="Inter" pitchFamily="34" charset="-120"/>
+                        </a:rPr>
+                        <a:t> "aynısını tekrarlama"</a:t>
                       </a:r>
                       <a:endParaRPr lang="en-US" sz="1150" dirty="0">
                         <a:latin typeface="Inter" charset="0"/>
@@ -9618,7 +10473,7 @@
                           <a:ea typeface="Inter" pitchFamily="34" charset="-122"/>
                           <a:cs typeface="Inter" pitchFamily="34" charset="-120"/>
                         </a:rPr>
-                        <a:t>MLMD `filter_query` · MLflow Model Registry</a:t>
+                        <a:t>smolagents + OpenHands</a:t>
                       </a:r>
                       <a:endParaRPr lang="en-US" sz="1150" dirty="0">
                         <a:latin typeface="Inter" charset="0"/>
@@ -9680,7 +10535,7 @@
                         <a:buNone/>
                       </a:pPr>
                       <a:r>
-                        <a:rPr lang="en-US" sz="1150" dirty="0">
+                        <a:rPr lang="en-US" sz="1150" b="1" dirty="0">
                           <a:solidFill>
                             <a:srgbClr val="1D1D1F"/>
                           </a:solidFill>
@@ -9688,7 +10543,21 @@
                           <a:ea typeface="Inter" pitchFamily="34" charset="-122"/>
                           <a:cs typeface="Inter" pitchFamily="34" charset="-120"/>
                         </a:rPr>
-                        <a:t>isimler prompt'ta</a:t>
+                        <a:t>Sebep-farkında</a:t>
+                      </a:r>
+                      <a:pPr indent="0" marL="0">
+                        <a:buNone/>
+                      </a:pPr>
+                      <a:r>
+                        <a:rPr lang="en-US" sz="1150" dirty="0">
+                          <a:solidFill>
+                            <a:srgbClr val="1D1D1F"/>
+                          </a:solidFill>
+                          <a:latin typeface="Inter" pitchFamily="34" charset="0"/>
+                          <a:ea typeface="Inter" pitchFamily="34" charset="-122"/>
+                          <a:cs typeface="Inter" pitchFamily="34" charset="-120"/>
+                        </a:rPr>
+                        <a:t> sayaç</a:t>
                       </a:r>
                       <a:endParaRPr lang="en-US" sz="1150" dirty="0">
                         <a:latin typeface="Inter" charset="0"/>
@@ -9756,629 +10625,7 @@
                           <a:ea typeface="Inter" pitchFamily="34" charset="-122"/>
                           <a:cs typeface="Inter" pitchFamily="34" charset="-120"/>
                         </a:rPr>
-                        <a:t>Google ADK `LoadArtifactsTool`</a:t>
-                      </a:r>
-                      <a:endParaRPr lang="en-US" sz="1150" dirty="0">
-                        <a:latin typeface="Inter" charset="0"/>
-                        <a:ea typeface="Inter" charset="0"/>
-                        <a:cs typeface="Inter" charset="0"/>
-                      </a:endParaRPr>
-                    </a:p>
-                  </a:txBody>
-                  <a:tcPr marL="114300" marR="114300" marT="76200" marB="76200" anchor="ctr">
-                    <a:lnL w="6350" cap="flat" cmpd="sng" algn="ctr">
-                      <a:solidFill>
-                        <a:srgbClr val="D8D8DC"/>
-                      </a:solidFill>
-                      <a:prstDash val="solid"/>
-                      <a:round/>
-                      <a:headEnd type="none" w="med" len="med"/>
-                      <a:tailEnd type="none" w="med" len="med"/>
-                    </a:lnL>
-                    <a:lnR w="6350" cap="flat" cmpd="sng" algn="ctr">
-                      <a:solidFill>
-                        <a:srgbClr val="D8D8DC"/>
-                      </a:solidFill>
-                      <a:prstDash val="solid"/>
-                      <a:round/>
-                      <a:headEnd type="none" w="med" len="med"/>
-                      <a:tailEnd type="none" w="med" len="med"/>
-                    </a:lnR>
-                    <a:lnT w="6350" cap="flat" cmpd="sng" algn="ctr">
-                      <a:solidFill>
-                        <a:srgbClr val="D8D8DC"/>
-                      </a:solidFill>
-                      <a:prstDash val="solid"/>
-                      <a:round/>
-                      <a:headEnd type="none" w="med" len="med"/>
-                      <a:tailEnd type="none" w="med" len="med"/>
-                    </a:lnT>
-                    <a:lnB w="6350" cap="flat" cmpd="sng" algn="ctr">
-                      <a:solidFill>
-                        <a:srgbClr val="D8D8DC"/>
-                      </a:solidFill>
-                      <a:prstDash val="solid"/>
-                      <a:round/>
-                      <a:headEnd type="none" w="med" len="med"/>
-                      <a:tailEnd type="none" w="med" len="med"/>
-                    </a:lnB>
-                    <a:solidFill>
-                      <a:srgbClr val="F5F5F7"/>
-                    </a:solidFill>
-                  </a:tcPr>
-                </a:tc>
-              </a:tr>
-              <a:tr h="0">
-                <a:tc>
-                  <a:txBody>
-                    <a:bodyPr/>
-                    <a:lstStyle/>
-                    <a:p>
-                      <a:pPr indent="0" marL="0">
-                        <a:buNone/>
-                      </a:pPr>
-                      <a:r>
-                        <a:rPr lang="en-US" sz="1150" dirty="0">
-                          <a:solidFill>
-                            <a:srgbClr val="1D1D1F"/>
-                          </a:solidFill>
-                          <a:latin typeface="Inter" pitchFamily="34" charset="0"/>
-                          <a:ea typeface="Inter" pitchFamily="34" charset="-122"/>
-                          <a:cs typeface="Inter" pitchFamily="34" charset="-120"/>
-                        </a:rPr>
-                        <a:t>bayt yolu · </a:t>
-                      </a:r>
-                      <a:pPr indent="0" marL="0">
-                        <a:buNone/>
-                      </a:pPr>
-                      <a:r>
-                        <a:rPr lang="en-US" sz="1150" dirty="0">
-                          <a:solidFill>
-                            <a:srgbClr val="0071E3"/>
-                          </a:solidFill>
-                          <a:latin typeface="JetBrains Mono" pitchFamily="34" charset="0"/>
-                          <a:ea typeface="JetBrains Mono" pitchFamily="34" charset="-122"/>
-                          <a:cs typeface="JetBrains Mono" pitchFamily="34" charset="-120"/>
-                        </a:rPr>
-                        <a:t>proxy</a:t>
-                      </a:r>
-                      <a:endParaRPr lang="en-US" sz="1150" dirty="0">
-                        <a:latin typeface="Inter" charset="0"/>
-                        <a:ea typeface="Inter" charset="0"/>
-                        <a:cs typeface="Inter" charset="0"/>
-                      </a:endParaRPr>
-                    </a:p>
-                  </a:txBody>
-                  <a:tcPr marL="114300" marR="114300" marT="76200" marB="76200" anchor="ctr">
-                    <a:lnL w="6350" cap="flat" cmpd="sng" algn="ctr">
-                      <a:solidFill>
-                        <a:srgbClr val="D8D8DC"/>
-                      </a:solidFill>
-                      <a:prstDash val="solid"/>
-                      <a:round/>
-                      <a:headEnd type="none" w="med" len="med"/>
-                      <a:tailEnd type="none" w="med" len="med"/>
-                    </a:lnL>
-                    <a:lnR w="6350" cap="flat" cmpd="sng" algn="ctr">
-                      <a:solidFill>
-                        <a:srgbClr val="D8D8DC"/>
-                      </a:solidFill>
-                      <a:prstDash val="solid"/>
-                      <a:round/>
-                      <a:headEnd type="none" w="med" len="med"/>
-                      <a:tailEnd type="none" w="med" len="med"/>
-                    </a:lnR>
-                    <a:lnT w="6350" cap="flat" cmpd="sng" algn="ctr">
-                      <a:solidFill>
-                        <a:srgbClr val="D8D8DC"/>
-                      </a:solidFill>
-                      <a:prstDash val="solid"/>
-                      <a:round/>
-                      <a:headEnd type="none" w="med" len="med"/>
-                      <a:tailEnd type="none" w="med" len="med"/>
-                    </a:lnT>
-                    <a:lnB w="6350" cap="flat" cmpd="sng" algn="ctr">
-                      <a:solidFill>
-                        <a:srgbClr val="D8D8DC"/>
-                      </a:solidFill>
-                      <a:prstDash val="solid"/>
-                      <a:round/>
-                      <a:headEnd type="none" w="med" len="med"/>
-                      <a:tailEnd type="none" w="med" len="med"/>
-                    </a:lnB>
-                    <a:solidFill>
-                      <a:srgbClr val="FFFFFF"/>
-                    </a:solidFill>
-                  </a:tcPr>
-                </a:tc>
-                <a:tc>
-                  <a:txBody>
-                    <a:bodyPr/>
-                    <a:lstStyle/>
-                    <a:p>
-                      <a:pPr indent="0" marL="0">
-                        <a:buNone/>
-                      </a:pPr>
-                      <a:r>
-                        <a:rPr lang="en-US" sz="1150" b="1" dirty="0">
-                          <a:solidFill>
-                            <a:srgbClr val="1D1D1F"/>
-                          </a:solidFill>
-                          <a:latin typeface="Inter" pitchFamily="34" charset="0"/>
-                          <a:ea typeface="Inter" pitchFamily="34" charset="-122"/>
-                          <a:cs typeface="Inter" pitchFamily="34" charset="-120"/>
-                        </a:rPr>
-                        <a:t>MLflow</a:t>
-                      </a:r>
-                      <a:pPr indent="0" marL="0">
-                        <a:buNone/>
-                      </a:pPr>
-                      <a:r>
-                        <a:rPr lang="en-US" sz="1150" dirty="0">
-                          <a:solidFill>
-                            <a:srgbClr val="1D1D1F"/>
-                          </a:solidFill>
-                          <a:latin typeface="Inter" pitchFamily="34" charset="0"/>
-                          <a:ea typeface="Inter" pitchFamily="34" charset="-122"/>
-                          <a:cs typeface="Inter" pitchFamily="34" charset="-120"/>
-                        </a:rPr>
-                        <a:t> proxied artifact access</a:t>
-                      </a:r>
-                      <a:endParaRPr lang="en-US" sz="1150" dirty="0">
-                        <a:latin typeface="Inter" charset="0"/>
-                        <a:ea typeface="Inter" charset="0"/>
-                        <a:cs typeface="Inter" charset="0"/>
-                      </a:endParaRPr>
-                    </a:p>
-                  </a:txBody>
-                  <a:tcPr marL="114300" marR="114300" marT="76200" marB="76200" anchor="ctr">
-                    <a:lnL w="6350" cap="flat" cmpd="sng" algn="ctr">
-                      <a:solidFill>
-                        <a:srgbClr val="D8D8DC"/>
-                      </a:solidFill>
-                      <a:prstDash val="solid"/>
-                      <a:round/>
-                      <a:headEnd type="none" w="med" len="med"/>
-                      <a:tailEnd type="none" w="med" len="med"/>
-                    </a:lnL>
-                    <a:lnR w="6350" cap="flat" cmpd="sng" algn="ctr">
-                      <a:solidFill>
-                        <a:srgbClr val="D8D8DC"/>
-                      </a:solidFill>
-                      <a:prstDash val="solid"/>
-                      <a:round/>
-                      <a:headEnd type="none" w="med" len="med"/>
-                      <a:tailEnd type="none" w="med" len="med"/>
-                    </a:lnR>
-                    <a:lnT w="6350" cap="flat" cmpd="sng" algn="ctr">
-                      <a:solidFill>
-                        <a:srgbClr val="D8D8DC"/>
-                      </a:solidFill>
-                      <a:prstDash val="solid"/>
-                      <a:round/>
-                      <a:headEnd type="none" w="med" len="med"/>
-                      <a:tailEnd type="none" w="med" len="med"/>
-                    </a:lnT>
-                    <a:lnB w="6350" cap="flat" cmpd="sng" algn="ctr">
-                      <a:solidFill>
-                        <a:srgbClr val="D8D8DC"/>
-                      </a:solidFill>
-                      <a:prstDash val="solid"/>
-                      <a:round/>
-                      <a:headEnd type="none" w="med" len="med"/>
-                      <a:tailEnd type="none" w="med" len="med"/>
-                    </a:lnB>
-                    <a:solidFill>
-                      <a:srgbClr val="FFFFFF"/>
-                    </a:solidFill>
-                  </a:tcPr>
-                </a:tc>
-              </a:tr>
-              <a:tr h="0">
-                <a:tc>
-                  <a:txBody>
-                    <a:bodyPr/>
-                    <a:lstStyle/>
-                    <a:p>
-                      <a:pPr indent="0" marL="0">
-                        <a:buNone/>
-                      </a:pPr>
-                      <a:r>
-                        <a:rPr lang="en-US" sz="1150" dirty="0">
-                          <a:solidFill>
-                            <a:srgbClr val="1D1D1F"/>
-                          </a:solidFill>
-                          <a:latin typeface="Inter" pitchFamily="34" charset="0"/>
-                          <a:ea typeface="Inter" pitchFamily="34" charset="-122"/>
-                          <a:cs typeface="Inter" pitchFamily="34" charset="-120"/>
-                        </a:rPr>
-                        <a:t>bayt yolu · </a:t>
-                      </a:r>
-                      <a:pPr indent="0" marL="0">
-                        <a:buNone/>
-                      </a:pPr>
-                      <a:r>
-                        <a:rPr lang="en-US" sz="1150" dirty="0">
-                          <a:solidFill>
-                            <a:srgbClr val="0071E3"/>
-                          </a:solidFill>
-                          <a:latin typeface="JetBrains Mono" pitchFamily="34" charset="0"/>
-                          <a:ea typeface="JetBrains Mono" pitchFamily="34" charset="-122"/>
-                          <a:cs typeface="JetBrains Mono" pitchFamily="34" charset="-120"/>
-                        </a:rPr>
-                        <a:t>direct</a:t>
-                      </a:r>
-                      <a:endParaRPr lang="en-US" sz="1150" dirty="0">
-                        <a:latin typeface="Inter" charset="0"/>
-                        <a:ea typeface="Inter" charset="0"/>
-                        <a:cs typeface="Inter" charset="0"/>
-                      </a:endParaRPr>
-                    </a:p>
-                  </a:txBody>
-                  <a:tcPr marL="114300" marR="114300" marT="76200" marB="76200" anchor="ctr">
-                    <a:lnL w="6350" cap="flat" cmpd="sng" algn="ctr">
-                      <a:solidFill>
-                        <a:srgbClr val="D8D8DC"/>
-                      </a:solidFill>
-                      <a:prstDash val="solid"/>
-                      <a:round/>
-                      <a:headEnd type="none" w="med" len="med"/>
-                      <a:tailEnd type="none" w="med" len="med"/>
-                    </a:lnL>
-                    <a:lnR w="6350" cap="flat" cmpd="sng" algn="ctr">
-                      <a:solidFill>
-                        <a:srgbClr val="D8D8DC"/>
-                      </a:solidFill>
-                      <a:prstDash val="solid"/>
-                      <a:round/>
-                      <a:headEnd type="none" w="med" len="med"/>
-                      <a:tailEnd type="none" w="med" len="med"/>
-                    </a:lnR>
-                    <a:lnT w="6350" cap="flat" cmpd="sng" algn="ctr">
-                      <a:solidFill>
-                        <a:srgbClr val="D8D8DC"/>
-                      </a:solidFill>
-                      <a:prstDash val="solid"/>
-                      <a:round/>
-                      <a:headEnd type="none" w="med" len="med"/>
-                      <a:tailEnd type="none" w="med" len="med"/>
-                    </a:lnT>
-                    <a:lnB w="6350" cap="flat" cmpd="sng" algn="ctr">
-                      <a:solidFill>
-                        <a:srgbClr val="D8D8DC"/>
-                      </a:solidFill>
-                      <a:prstDash val="solid"/>
-                      <a:round/>
-                      <a:headEnd type="none" w="med" len="med"/>
-                      <a:tailEnd type="none" w="med" len="med"/>
-                    </a:lnB>
-                    <a:solidFill>
-                      <a:srgbClr val="F5F5F7"/>
-                    </a:solidFill>
-                  </a:tcPr>
-                </a:tc>
-                <a:tc>
-                  <a:txBody>
-                    <a:bodyPr/>
-                    <a:lstStyle/>
-                    <a:p>
-                      <a:pPr indent="0" marL="0">
-                        <a:buNone/>
-                      </a:pPr>
-                      <a:r>
-                        <a:rPr lang="en-US" sz="1150" b="1" dirty="0">
-                          <a:solidFill>
-                            <a:srgbClr val="1D1D1F"/>
-                          </a:solidFill>
-                          <a:latin typeface="Inter" pitchFamily="34" charset="0"/>
-                          <a:ea typeface="Inter" pitchFamily="34" charset="-122"/>
-                          <a:cs typeface="Inter" pitchFamily="34" charset="-120"/>
-                        </a:rPr>
-                        <a:t>KFP / Argo</a:t>
-                      </a:r>
-                      <a:pPr indent="0" marL="0">
-                        <a:buNone/>
-                      </a:pPr>
-                      <a:r>
-                        <a:rPr lang="en-US" sz="1150" dirty="0">
-                          <a:solidFill>
-                            <a:srgbClr val="1D1D1F"/>
-                          </a:solidFill>
-                          <a:latin typeface="Inter" pitchFamily="34" charset="0"/>
-                          <a:ea typeface="Inter" pitchFamily="34" charset="-122"/>
-                          <a:cs typeface="Inter" pitchFamily="34" charset="-120"/>
-                        </a:rPr>
-                        <a:t> — bayt depoya, künye kayıt defterine</a:t>
-                      </a:r>
-                      <a:endParaRPr lang="en-US" sz="1150" dirty="0">
-                        <a:latin typeface="Inter" charset="0"/>
-                        <a:ea typeface="Inter" charset="0"/>
-                        <a:cs typeface="Inter" charset="0"/>
-                      </a:endParaRPr>
-                    </a:p>
-                  </a:txBody>
-                  <a:tcPr marL="114300" marR="114300" marT="76200" marB="76200" anchor="ctr">
-                    <a:lnL w="6350" cap="flat" cmpd="sng" algn="ctr">
-                      <a:solidFill>
-                        <a:srgbClr val="D8D8DC"/>
-                      </a:solidFill>
-                      <a:prstDash val="solid"/>
-                      <a:round/>
-                      <a:headEnd type="none" w="med" len="med"/>
-                      <a:tailEnd type="none" w="med" len="med"/>
-                    </a:lnL>
-                    <a:lnR w="6350" cap="flat" cmpd="sng" algn="ctr">
-                      <a:solidFill>
-                        <a:srgbClr val="D8D8DC"/>
-                      </a:solidFill>
-                      <a:prstDash val="solid"/>
-                      <a:round/>
-                      <a:headEnd type="none" w="med" len="med"/>
-                      <a:tailEnd type="none" w="med" len="med"/>
-                    </a:lnR>
-                    <a:lnT w="6350" cap="flat" cmpd="sng" algn="ctr">
-                      <a:solidFill>
-                        <a:srgbClr val="D8D8DC"/>
-                      </a:solidFill>
-                      <a:prstDash val="solid"/>
-                      <a:round/>
-                      <a:headEnd type="none" w="med" len="med"/>
-                      <a:tailEnd type="none" w="med" len="med"/>
-                    </a:lnT>
-                    <a:lnB w="6350" cap="flat" cmpd="sng" algn="ctr">
-                      <a:solidFill>
-                        <a:srgbClr val="D8D8DC"/>
-                      </a:solidFill>
-                      <a:prstDash val="solid"/>
-                      <a:round/>
-                      <a:headEnd type="none" w="med" len="med"/>
-                      <a:tailEnd type="none" w="med" len="med"/>
-                    </a:lnB>
-                    <a:solidFill>
-                      <a:srgbClr val="F5F5F7"/>
-                    </a:solidFill>
-                  </a:tcPr>
-                </a:tc>
-              </a:tr>
-              <a:tr h="0">
-                <a:tc>
-                  <a:txBody>
-                    <a:bodyPr/>
-                    <a:lstStyle/>
-                    <a:p>
-                      <a:pPr indent="0" marL="0">
-                        <a:buNone/>
-                      </a:pPr>
-                      <a:r>
-                        <a:rPr lang="en-US" sz="1150" b="1" dirty="0">
-                          <a:solidFill>
-                            <a:srgbClr val="1D1D1F"/>
-                          </a:solidFill>
-                          <a:latin typeface="Inter" pitchFamily="34" charset="0"/>
-                          <a:ea typeface="Inter" pitchFamily="34" charset="-122"/>
-                          <a:cs typeface="Inter" pitchFamily="34" charset="-120"/>
-                        </a:rPr>
-                        <a:t>sandbox'ta sıfır ağ çağrısı</a:t>
-                      </a:r>
-                      <a:endParaRPr lang="en-US" sz="1150" dirty="0">
-                        <a:latin typeface="Inter" charset="0"/>
-                        <a:ea typeface="Inter" charset="0"/>
-                        <a:cs typeface="Inter" charset="0"/>
-                      </a:endParaRPr>
-                    </a:p>
-                  </a:txBody>
-                  <a:tcPr marL="114300" marR="114300" marT="76200" marB="76200" anchor="ctr">
-                    <a:lnL w="6350" cap="flat" cmpd="sng" algn="ctr">
-                      <a:solidFill>
-                        <a:srgbClr val="D8D8DC"/>
-                      </a:solidFill>
-                      <a:prstDash val="solid"/>
-                      <a:round/>
-                      <a:headEnd type="none" w="med" len="med"/>
-                      <a:tailEnd type="none" w="med" len="med"/>
-                    </a:lnL>
-                    <a:lnR w="6350" cap="flat" cmpd="sng" algn="ctr">
-                      <a:solidFill>
-                        <a:srgbClr val="D8D8DC"/>
-                      </a:solidFill>
-                      <a:prstDash val="solid"/>
-                      <a:round/>
-                      <a:headEnd type="none" w="med" len="med"/>
-                      <a:tailEnd type="none" w="med" len="med"/>
-                    </a:lnR>
-                    <a:lnT w="6350" cap="flat" cmpd="sng" algn="ctr">
-                      <a:solidFill>
-                        <a:srgbClr val="D8D8DC"/>
-                      </a:solidFill>
-                      <a:prstDash val="solid"/>
-                      <a:round/>
-                      <a:headEnd type="none" w="med" len="med"/>
-                      <a:tailEnd type="none" w="med" len="med"/>
-                    </a:lnT>
-                    <a:lnB w="6350" cap="flat" cmpd="sng" algn="ctr">
-                      <a:solidFill>
-                        <a:srgbClr val="D8D8DC"/>
-                      </a:solidFill>
-                      <a:prstDash val="solid"/>
-                      <a:round/>
-                      <a:headEnd type="none" w="med" len="med"/>
-                      <a:tailEnd type="none" w="med" len="med"/>
-                    </a:lnB>
-                    <a:solidFill>
-                      <a:srgbClr val="FFFFFF"/>
-                    </a:solidFill>
-                  </a:tcPr>
-                </a:tc>
-                <a:tc>
-                  <a:txBody>
-                    <a:bodyPr/>
-                    <a:lstStyle/>
-                    <a:p>
-                      <a:pPr indent="0" marL="0">
-                        <a:buNone/>
-                      </a:pPr>
-                      <a:r>
-                        <a:rPr lang="en-US" sz="1150" b="1" dirty="0">
-                          <a:solidFill>
-                            <a:srgbClr val="1D1D1F"/>
-                          </a:solidFill>
-                          <a:latin typeface="Inter" pitchFamily="34" charset="0"/>
-                          <a:ea typeface="Inter" pitchFamily="34" charset="-122"/>
-                          <a:cs typeface="Inter" pitchFamily="34" charset="-120"/>
-                        </a:rPr>
-                        <a:t>KFP</a:t>
-                      </a:r>
-                      <a:pPr indent="0" marL="0">
-                        <a:buNone/>
-                      </a:pPr>
-                      <a:r>
-                        <a:rPr lang="en-US" sz="1150" dirty="0">
-                          <a:solidFill>
-                            <a:srgbClr val="1D1D1F"/>
-                          </a:solidFill>
-                          <a:latin typeface="Inter" pitchFamily="34" charset="0"/>
-                          <a:ea typeface="Inter" pitchFamily="34" charset="-122"/>
-                          <a:cs typeface="Inter" pitchFamily="34" charset="-120"/>
-                        </a:rPr>
-                        <a:t> — kullanıcı bileşeni hiçbir şey çağırmaz</a:t>
-                      </a:r>
-                      <a:endParaRPr lang="en-US" sz="1150" dirty="0">
-                        <a:latin typeface="Inter" charset="0"/>
-                        <a:ea typeface="Inter" charset="0"/>
-                        <a:cs typeface="Inter" charset="0"/>
-                      </a:endParaRPr>
-                    </a:p>
-                  </a:txBody>
-                  <a:tcPr marL="114300" marR="114300" marT="76200" marB="76200" anchor="ctr">
-                    <a:lnL w="6350" cap="flat" cmpd="sng" algn="ctr">
-                      <a:solidFill>
-                        <a:srgbClr val="D8D8DC"/>
-                      </a:solidFill>
-                      <a:prstDash val="solid"/>
-                      <a:round/>
-                      <a:headEnd type="none" w="med" len="med"/>
-                      <a:tailEnd type="none" w="med" len="med"/>
-                    </a:lnL>
-                    <a:lnR w="6350" cap="flat" cmpd="sng" algn="ctr">
-                      <a:solidFill>
-                        <a:srgbClr val="D8D8DC"/>
-                      </a:solidFill>
-                      <a:prstDash val="solid"/>
-                      <a:round/>
-                      <a:headEnd type="none" w="med" len="med"/>
-                      <a:tailEnd type="none" w="med" len="med"/>
-                    </a:lnR>
-                    <a:lnT w="6350" cap="flat" cmpd="sng" algn="ctr">
-                      <a:solidFill>
-                        <a:srgbClr val="D8D8DC"/>
-                      </a:solidFill>
-                      <a:prstDash val="solid"/>
-                      <a:round/>
-                      <a:headEnd type="none" w="med" len="med"/>
-                      <a:tailEnd type="none" w="med" len="med"/>
-                    </a:lnT>
-                    <a:lnB w="6350" cap="flat" cmpd="sng" algn="ctr">
-                      <a:solidFill>
-                        <a:srgbClr val="D8D8DC"/>
-                      </a:solidFill>
-                      <a:prstDash val="solid"/>
-                      <a:round/>
-                      <a:headEnd type="none" w="med" len="med"/>
-                      <a:tailEnd type="none" w="med" len="med"/>
-                    </a:lnB>
-                    <a:solidFill>
-                      <a:srgbClr val="FFFFFF"/>
-                    </a:solidFill>
-                  </a:tcPr>
-                </a:tc>
-              </a:tr>
-              <a:tr h="0">
-                <a:tc>
-                  <a:txBody>
-                    <a:bodyPr/>
-                    <a:lstStyle/>
-                    <a:p>
-                      <a:pPr indent="0" marL="0">
-                        <a:buNone/>
-                      </a:pPr>
-                      <a:r>
-                        <a:rPr lang="en-US" sz="1150" b="1" dirty="0">
-                          <a:solidFill>
-                            <a:srgbClr val="1D1D1F"/>
-                          </a:solidFill>
-                          <a:latin typeface="Inter" pitchFamily="34" charset="0"/>
-                          <a:ea typeface="Inter" pitchFamily="34" charset="-122"/>
-                          <a:cs typeface="Inter" pitchFamily="34" charset="-120"/>
-                        </a:rPr>
-                        <a:t>İzolasyon</a:t>
-                      </a:r>
-                      <a:endParaRPr lang="en-US" sz="1150" dirty="0">
-                        <a:latin typeface="Inter" charset="0"/>
-                        <a:ea typeface="Inter" charset="0"/>
-                        <a:cs typeface="Inter" charset="0"/>
-                      </a:endParaRPr>
-                    </a:p>
-                  </a:txBody>
-                  <a:tcPr marL="114300" marR="114300" marT="76200" marB="76200" anchor="ctr">
-                    <a:lnL w="6350" cap="flat" cmpd="sng" algn="ctr">
-                      <a:solidFill>
-                        <a:srgbClr val="D8D8DC"/>
-                      </a:solidFill>
-                      <a:prstDash val="solid"/>
-                      <a:round/>
-                      <a:headEnd type="none" w="med" len="med"/>
-                      <a:tailEnd type="none" w="med" len="med"/>
-                    </a:lnL>
-                    <a:lnR w="6350" cap="flat" cmpd="sng" algn="ctr">
-                      <a:solidFill>
-                        <a:srgbClr val="D8D8DC"/>
-                      </a:solidFill>
-                      <a:prstDash val="solid"/>
-                      <a:round/>
-                      <a:headEnd type="none" w="med" len="med"/>
-                      <a:tailEnd type="none" w="med" len="med"/>
-                    </a:lnR>
-                    <a:lnT w="6350" cap="flat" cmpd="sng" algn="ctr">
-                      <a:solidFill>
-                        <a:srgbClr val="D8D8DC"/>
-                      </a:solidFill>
-                      <a:prstDash val="solid"/>
-                      <a:round/>
-                      <a:headEnd type="none" w="med" len="med"/>
-                      <a:tailEnd type="none" w="med" len="med"/>
-                    </a:lnT>
-                    <a:lnB w="6350" cap="flat" cmpd="sng" algn="ctr">
-                      <a:solidFill>
-                        <a:srgbClr val="D8D8DC"/>
-                      </a:solidFill>
-                      <a:prstDash val="solid"/>
-                      <a:round/>
-                      <a:headEnd type="none" w="med" len="med"/>
-                      <a:tailEnd type="none" w="med" len="med"/>
-                    </a:lnB>
-                    <a:solidFill>
-                      <a:srgbClr val="F5F5F7"/>
-                    </a:solidFill>
-                  </a:tcPr>
-                </a:tc>
-                <a:tc>
-                  <a:txBody>
-                    <a:bodyPr/>
-                    <a:lstStyle/>
-                    <a:p>
-                      <a:pPr indent="0" marL="0">
-                        <a:buNone/>
-                      </a:pPr>
-                      <a:r>
-                        <a:rPr lang="en-US" sz="1150" b="1" dirty="0">
-                          <a:solidFill>
-                            <a:srgbClr val="C0392B"/>
-                          </a:solidFill>
-                          <a:latin typeface="Inter" pitchFamily="34" charset="0"/>
-                          <a:ea typeface="Inter" pitchFamily="34" charset="-122"/>
-                          <a:cs typeface="Inter" pitchFamily="34" charset="-120"/>
-                        </a:rPr>
-                        <a:t>Kimse — bizimki daha zayıf (düz container)</a:t>
+                        <a:t>Anthropic `error_code` · Codex `is_likely_sandbox_denied`</a:t>
                       </a:r>
                       <a:endParaRPr lang="en-US" sz="1150" dirty="0">
                         <a:latin typeface="Inter" charset="0"/>
@@ -10442,7 +10689,2415 @@
         </p:nvSpPr>
         <p:spPr>
           <a:xfrm>
-            <a:off x="566928" y="4901184"/>
+            <a:off x="566928" y="3657600"/>
+            <a:ext cx="11057839" cy="676656"/>
+          </a:xfrm>
+          <a:prstGeom prst="rect">
+            <a:avLst/>
+          </a:prstGeom>
+          <a:solidFill>
+            <a:srgbClr val="E8F1FD"/>
+          </a:solidFill>
+          <a:ln/>
+        </p:spPr>
+      </p:sp>
+      <p:sp>
+        <p:nvSpPr>
+          <p:cNvPr id="7" name="Text 4"/>
+          <p:cNvSpPr/>
+          <p:nvPr/>
+        </p:nvSpPr>
+        <p:spPr>
+          <a:xfrm>
+            <a:off x="713232" y="3712464"/>
+            <a:ext cx="10765231" cy="548640"/>
+          </a:xfrm>
+          <a:prstGeom prst="rect">
+            <a:avLst/>
+          </a:prstGeom>
+          <a:noFill/>
+          <a:ln/>
+        </p:spPr>
+        <p:txBody>
+          <a:bodyPr wrap="square" rtlCol="0" anchor="ctr"/>
+          <a:lstStyle/>
+          <a:p>
+            <a:pPr indent="0" marL="0">
+              <a:buNone/>
+            </a:pPr>
+            <a:r>
+              <a:rPr lang="en-US" sz="1300" b="1" dirty="0">
+                <a:solidFill>
+                  <a:srgbClr val="1D1D1F"/>
+                </a:solidFill>
+                <a:latin typeface="Inter" pitchFamily="34" charset="0"/>
+                <a:ea typeface="Inter" pitchFamily="34" charset="-122"/>
+                <a:cs typeface="Inter" pitchFamily="34" charset="-120"/>
+              </a:rPr>
+              <a:t>Sayaç neden bölündü:</a:t>
+            </a:r>
+            <a:pPr indent="0" marL="0">
+              <a:buNone/>
+            </a:pPr>
+            <a:r>
+              <a:rPr lang="en-US" sz="1300" dirty="0">
+                <a:solidFill>
+                  <a:srgbClr val="1D1D1F"/>
+                </a:solidFill>
+                <a:latin typeface="Inter" pitchFamily="34" charset="0"/>
+                <a:ea typeface="Inter" pitchFamily="34" charset="-122"/>
+                <a:cs typeface="Inter" pitchFamily="34" charset="-120"/>
+              </a:rPr>
+              <a:t> tek sayaç kod hatasını, ağ engelini ve timeout'u aynı kutuya koyuyordu. Sınır ağ engeli için konmuştu; kod hatası da aynı bütçeden yediği için self-repair'e </a:t>
+            </a:r>
+            <a:pPr indent="0" marL="0">
+              <a:buNone/>
+            </a:pPr>
+            <a:r>
+              <a:rPr lang="en-US" sz="1300" b="1" dirty="0">
+                <a:solidFill>
+                  <a:srgbClr val="1D1D1F"/>
+                </a:solidFill>
+                <a:latin typeface="Inter" pitchFamily="34" charset="0"/>
+                <a:ea typeface="Inter" pitchFamily="34" charset="-122"/>
+                <a:cs typeface="Inter" pitchFamily="34" charset="-120"/>
+              </a:rPr>
+              <a:t>1 deneme</a:t>
+            </a:r>
+            <a:pPr indent="0" marL="0">
+              <a:buNone/>
+            </a:pPr>
+            <a:r>
+              <a:rPr lang="en-US" sz="1300" dirty="0">
+                <a:solidFill>
+                  <a:srgbClr val="1D1D1F"/>
+                </a:solidFill>
+                <a:latin typeface="Inter" pitchFamily="34" charset="0"/>
+                <a:ea typeface="Inter" pitchFamily="34" charset="-122"/>
+                <a:cs typeface="Inter" pitchFamily="34" charset="-120"/>
+              </a:rPr>
+              <a:t> kalıyordu. Artık ağ engeli </a:t>
+            </a:r>
+            <a:pPr indent="0" marL="0">
+              <a:buNone/>
+            </a:pPr>
+            <a:r>
+              <a:rPr lang="en-US" sz="1300" b="1" dirty="0">
+                <a:solidFill>
+                  <a:srgbClr val="1D1D1F"/>
+                </a:solidFill>
+                <a:latin typeface="Inter" pitchFamily="34" charset="0"/>
+                <a:ea typeface="Inter" pitchFamily="34" charset="-122"/>
+                <a:cs typeface="Inter" pitchFamily="34" charset="-120"/>
+              </a:rPr>
+              <a:t>2</a:t>
+            </a:r>
+            <a:pPr indent="0" marL="0">
+              <a:buNone/>
+            </a:pPr>
+            <a:r>
+              <a:rPr lang="en-US" sz="1300" dirty="0">
+                <a:solidFill>
+                  <a:srgbClr val="1D1D1F"/>
+                </a:solidFill>
+                <a:latin typeface="Inter" pitchFamily="34" charset="0"/>
+                <a:ea typeface="Inter" pitchFamily="34" charset="-122"/>
+                <a:cs typeface="Inter" pitchFamily="34" charset="-120"/>
+              </a:rPr>
+              <a:t>, kod hatası </a:t>
+            </a:r>
+            <a:pPr indent="0" marL="0">
+              <a:buNone/>
+            </a:pPr>
+            <a:r>
+              <a:rPr lang="en-US" sz="1300" b="1" dirty="0">
+                <a:solidFill>
+                  <a:srgbClr val="1D1D1F"/>
+                </a:solidFill>
+                <a:latin typeface="Inter" pitchFamily="34" charset="0"/>
+                <a:ea typeface="Inter" pitchFamily="34" charset="-122"/>
+                <a:cs typeface="Inter" pitchFamily="34" charset="-120"/>
+              </a:rPr>
+              <a:t>5</a:t>
+            </a:r>
+            <a:pPr indent="0" marL="0">
+              <a:buNone/>
+            </a:pPr>
+            <a:r>
+              <a:rPr lang="en-US" sz="1300" dirty="0">
+                <a:solidFill>
+                  <a:srgbClr val="1D1D1F"/>
+                </a:solidFill>
+                <a:latin typeface="Inter" pitchFamily="34" charset="0"/>
+                <a:ea typeface="Inter" pitchFamily="34" charset="-122"/>
+                <a:cs typeface="Inter" pitchFamily="34" charset="-120"/>
+              </a:rPr>
+              <a:t>.</a:t>
+            </a:r>
+            <a:endParaRPr lang="en-US" sz="1300" dirty="0"/>
+          </a:p>
+        </p:txBody>
+      </p:sp>
+      <p:sp>
+        <p:nvSpPr>
+          <p:cNvPr id="8" name="Shape 5"/>
+          <p:cNvSpPr/>
+          <p:nvPr/>
+        </p:nvSpPr>
+        <p:spPr>
+          <a:xfrm>
+            <a:off x="566928" y="4498848"/>
+            <a:ext cx="41148" cy="932688"/>
+          </a:xfrm>
+          <a:prstGeom prst="rect">
+            <a:avLst/>
+          </a:prstGeom>
+          <a:solidFill>
+            <a:srgbClr val="0071E3"/>
+          </a:solidFill>
+          <a:ln/>
+        </p:spPr>
+      </p:sp>
+      <p:sp>
+        <p:nvSpPr>
+          <p:cNvPr id="9" name="Text 6"/>
+          <p:cNvSpPr/>
+          <p:nvPr/>
+        </p:nvSpPr>
+        <p:spPr>
+          <a:xfrm>
+            <a:off x="768096" y="4498848"/>
+            <a:ext cx="10783519" cy="932688"/>
+          </a:xfrm>
+          <a:prstGeom prst="rect">
+            <a:avLst/>
+          </a:prstGeom>
+          <a:noFill/>
+          <a:ln/>
+        </p:spPr>
+        <p:txBody>
+          <a:bodyPr wrap="square" rtlCol="0" anchor="ctr"/>
+          <a:lstStyle/>
+          <a:p>
+            <a:pPr indent="0" marL="0">
+              <a:buNone/>
+            </a:pPr>
+            <a:r>
+              <a:rPr lang="en-US" sz="1300" b="1" i="1" dirty="0">
+                <a:solidFill>
+                  <a:srgbClr val="1D1D1F"/>
+                </a:solidFill>
+                <a:latin typeface="Inter" pitchFamily="34" charset="0"/>
+                <a:ea typeface="Inter" pitchFamily="34" charset="-122"/>
+                <a:cs typeface="Inter" pitchFamily="34" charset="-120"/>
+              </a:rPr>
+              <a:t>Bütçeyi büyütmek tek başına çözüm değil.</a:t>
+            </a:r>
+            <a:pPr indent="0" marL="0">
+              <a:buNone/>
+            </a:pPr>
+            <a:r>
+              <a:rPr lang="en-US" sz="1300" i="1" dirty="0">
+                <a:solidFill>
+                  <a:srgbClr val="1D1D1F"/>
+                </a:solidFill>
+                <a:latin typeface="Inter" pitchFamily="34" charset="0"/>
+                <a:ea typeface="Inter" pitchFamily="34" charset="-122"/>
+                <a:cs typeface="Inter" pitchFamily="34" charset="-120"/>
+              </a:rPr>
+              <a:t> Olausson (ICLR 2024): self-repair kazancı *"mütevazı, bazen hiç yok"*; darboğaz deneme sayısı değil </a:t>
+            </a:r>
+            <a:pPr indent="0" marL="0">
+              <a:buNone/>
+            </a:pPr>
+            <a:r>
+              <a:rPr lang="en-US" sz="1300" b="1" i="1" dirty="0">
+                <a:solidFill>
+                  <a:srgbClr val="1D1D1F"/>
+                </a:solidFill>
+                <a:latin typeface="Inter" pitchFamily="34" charset="0"/>
+                <a:ea typeface="Inter" pitchFamily="34" charset="-122"/>
+                <a:cs typeface="Inter" pitchFamily="34" charset="-120"/>
+              </a:rPr>
+              <a:t>geri bildirim kalitesi</a:t>
+            </a:r>
+            <a:pPr indent="0" marL="0">
+              <a:buNone/>
+            </a:pPr>
+            <a:r>
+              <a:rPr lang="en-US" sz="1300" i="1" dirty="0">
+                <a:solidFill>
+                  <a:srgbClr val="1D1D1F"/>
+                </a:solidFill>
+                <a:latin typeface="Inter" pitchFamily="34" charset="0"/>
+                <a:ea typeface="Inter" pitchFamily="34" charset="-122"/>
+                <a:cs typeface="Inter" pitchFamily="34" charset="-120"/>
+              </a:rPr>
+              <a:t> — aynı koda insan geri bildirimi verilince başarı </a:t>
+            </a:r>
+            <a:pPr indent="0" marL="0">
+              <a:buNone/>
+            </a:pPr>
+            <a:r>
+              <a:rPr lang="en-US" sz="1300" b="1" i="1" dirty="0">
+                <a:solidFill>
+                  <a:srgbClr val="1D1D1F"/>
+                </a:solidFill>
+                <a:latin typeface="Inter" pitchFamily="34" charset="0"/>
+                <a:ea typeface="Inter" pitchFamily="34" charset="-122"/>
+                <a:cs typeface="Inter" pitchFamily="34" charset="-120"/>
+              </a:rPr>
+              <a:t>%33 → %52</a:t>
+            </a:r>
+            <a:pPr indent="0" marL="0">
+              <a:buNone/>
+            </a:pPr>
+            <a:r>
+              <a:rPr lang="en-US" sz="1300" i="1" dirty="0">
+                <a:solidFill>
+                  <a:srgbClr val="1D1D1F"/>
+                </a:solidFill>
+                <a:latin typeface="Inter" pitchFamily="34" charset="0"/>
+                <a:ea typeface="Inter" pitchFamily="34" charset="-122"/>
+                <a:cs typeface="Inter" pitchFamily="34" charset="-120"/>
+              </a:rPr>
+              <a:t>. Sıra: önce sinyal, en son bütçe.</a:t>
+            </a:r>
+            <a:endParaRPr lang="en-US" sz="1300" dirty="0"/>
+          </a:p>
+        </p:txBody>
+      </p:sp>
+      <p:sp>
+        <p:nvSpPr>
+          <p:cNvPr id="10" name="Shape 7"/>
+          <p:cNvSpPr/>
+          <p:nvPr/>
+        </p:nvSpPr>
+        <p:spPr>
+          <a:xfrm>
+            <a:off x="0" y="0"/>
+            <a:ext cx="12191695" cy="50292"/>
+          </a:xfrm>
+          <a:prstGeom prst="rect">
+            <a:avLst/>
+          </a:prstGeom>
+          <a:solidFill>
+            <a:srgbClr val="0071E3"/>
+          </a:solidFill>
+          <a:ln/>
+        </p:spPr>
+      </p:sp>
+      <p:sp>
+        <p:nvSpPr>
+          <p:cNvPr id="11" name="Text 8"/>
+          <p:cNvSpPr/>
+          <p:nvPr/>
+        </p:nvSpPr>
+        <p:spPr>
+          <a:xfrm>
+            <a:off x="566928" y="6455664"/>
+            <a:ext cx="5486400" cy="256032"/>
+          </a:xfrm>
+          <a:prstGeom prst="rect">
+            <a:avLst/>
+          </a:prstGeom>
+          <a:noFill/>
+          <a:ln/>
+        </p:spPr>
+        <p:txBody>
+          <a:bodyPr wrap="square" rtlCol="0" anchor="ctr"/>
+          <a:lstStyle/>
+          <a:p>
+            <a:pPr indent="0" marL="0">
+              <a:buNone/>
+            </a:pPr>
+            <a:r>
+              <a:rPr lang="en-US" sz="900" dirty="0">
+                <a:solidFill>
+                  <a:srgbClr val="6E6E73"/>
+                </a:solidFill>
+                <a:latin typeface="Inter" pitchFamily="34" charset="0"/>
+                <a:ea typeface="Inter" pitchFamily="34" charset="-122"/>
+                <a:cs typeface="Inter" pitchFamily="34" charset="-120"/>
+              </a:rPr>
+              <a:t>PTC · Artifact Persistence</a:t>
+            </a:r>
+            <a:endParaRPr lang="en-US" sz="900" dirty="0"/>
+          </a:p>
+        </p:txBody>
+      </p:sp>
+      <p:sp>
+        <p:nvSpPr>
+          <p:cNvPr id="12" name="Text 9"/>
+          <p:cNvSpPr/>
+          <p:nvPr/>
+        </p:nvSpPr>
+        <p:spPr>
+          <a:xfrm>
+            <a:off x="10527487" y="6455664"/>
+            <a:ext cx="1097280" cy="256032"/>
+          </a:xfrm>
+          <a:prstGeom prst="rect">
+            <a:avLst/>
+          </a:prstGeom>
+          <a:noFill/>
+          <a:ln/>
+        </p:spPr>
+        <p:txBody>
+          <a:bodyPr wrap="square" rtlCol="0" anchor="ctr"/>
+          <a:lstStyle/>
+          <a:p>
+            <a:pPr algn="r" indent="0" marL="0">
+              <a:buNone/>
+            </a:pPr>
+            <a:r>
+              <a:rPr lang="en-US" sz="900" dirty="0">
+                <a:solidFill>
+                  <a:srgbClr val="6E6E73"/>
+                </a:solidFill>
+                <a:latin typeface="JetBrains Mono" pitchFamily="34" charset="0"/>
+                <a:ea typeface="JetBrains Mono" pitchFamily="34" charset="-122"/>
+                <a:cs typeface="JetBrains Mono" pitchFamily="34" charset="-120"/>
+              </a:rPr>
+              <a:t>10 / 13</a:t>
+            </a:r>
+            <a:endParaRPr lang="en-US" sz="900" dirty="0"/>
+          </a:p>
+        </p:txBody>
+      </p:sp>
+    </p:spTree>
+  </p:cSld>
+  <p:clrMapOvr>
+    <a:masterClrMapping/>
+  </p:clrMapOvr>
+</p:sld>
+</file>
+
+<file path=ppt/slides/slide15.xml><?xml version="1.0" encoding="utf-8"?>
+<p:sld xmlns:a="http://schemas.openxmlformats.org/drawingml/2006/main" xmlns:r="http://schemas.openxmlformats.org/officeDocument/2006/relationships" xmlns:p="http://schemas.openxmlformats.org/presentationml/2006/main">
+  <p:cSld name="Slide 15">
+    <p:bg>
+      <p:bgPr>
+        <a:solidFill>
+          <a:srgbClr val="FFFFFF"/>
+        </a:solidFill>
+      </p:bgPr>
+    </p:bg>
+    <p:spTree>
+      <p:nvGrpSpPr>
+        <p:cNvPr id="1" name=""/>
+        <p:cNvGrpSpPr/>
+        <p:nvPr/>
+      </p:nvGrpSpPr>
+      <p:grpSpPr>
+        <a:xfrm>
+          <a:off x="0" y="0"/>
+          <a:ext cx="0" cy="0"/>
+          <a:chOff x="0" y="0"/>
+          <a:chExt cx="0" cy="0"/>
+        </a:xfrm>
+      </p:grpSpPr>
+      <p:sp>
+        <p:nvSpPr>
+          <p:cNvPr id="2" name="Text 0"/>
+          <p:cNvSpPr/>
+          <p:nvPr/>
+        </p:nvSpPr>
+        <p:spPr>
+          <a:xfrm>
+            <a:off x="566928" y="256032"/>
+            <a:ext cx="3108960" cy="219456"/>
+          </a:xfrm>
+          <a:prstGeom prst="rect">
+            <a:avLst/>
+          </a:prstGeom>
+          <a:noFill/>
+          <a:ln/>
+        </p:spPr>
+        <p:txBody>
+          <a:bodyPr wrap="square" rtlCol="0" anchor="ctr"/>
+          <a:lstStyle/>
+          <a:p>
+            <a:pPr indent="0" marL="0">
+              <a:buNone/>
+            </a:pPr>
+            <a:r>
+              <a:rPr lang="en-US" sz="950" b="1" spc="160" kern="0" dirty="0">
+                <a:solidFill>
+                  <a:srgbClr val="0071E3"/>
+                </a:solidFill>
+                <a:latin typeface="Inter" pitchFamily="34" charset="0"/>
+                <a:ea typeface="Inter" pitchFamily="34" charset="-122"/>
+                <a:cs typeface="Inter" pitchFamily="34" charset="-120"/>
+              </a:rPr>
+              <a:t>SAYFA 11</a:t>
+            </a:r>
+            <a:endParaRPr lang="en-US" sz="950" dirty="0"/>
+          </a:p>
+        </p:txBody>
+      </p:sp>
+      <p:sp>
+        <p:nvSpPr>
+          <p:cNvPr id="3" name="Text 1"/>
+          <p:cNvSpPr/>
+          <p:nvPr/>
+        </p:nvSpPr>
+        <p:spPr>
+          <a:xfrm>
+            <a:off x="566928" y="475488"/>
+            <a:ext cx="11057839" cy="512064"/>
+          </a:xfrm>
+          <a:prstGeom prst="rect">
+            <a:avLst/>
+          </a:prstGeom>
+          <a:noFill/>
+          <a:ln/>
+        </p:spPr>
+        <p:txBody>
+          <a:bodyPr wrap="square" rtlCol="0" anchor="ctr"/>
+          <a:lstStyle/>
+          <a:p>
+            <a:pPr indent="0" marL="0">
+              <a:buNone/>
+            </a:pPr>
+            <a:r>
+              <a:rPr lang="en-US" sz="2700" b="1" spc="-40" kern="0" dirty="0">
+                <a:solidFill>
+                  <a:srgbClr val="1D1D1F"/>
+                </a:solidFill>
+                <a:latin typeface="Inter" pitchFamily="34" charset="0"/>
+                <a:ea typeface="Inter" pitchFamily="34" charset="-122"/>
+                <a:cs typeface="Inter" pitchFamily="34" charset="-120"/>
+              </a:rPr>
+              <a:t>Biz neredeyiz</a:t>
+            </a:r>
+            <a:endParaRPr lang="en-US" sz="2700" dirty="0"/>
+          </a:p>
+        </p:txBody>
+      </p:sp>
+      <p:sp>
+        <p:nvSpPr>
+          <p:cNvPr id="4" name="Shape 2"/>
+          <p:cNvSpPr/>
+          <p:nvPr/>
+        </p:nvSpPr>
+        <p:spPr>
+          <a:xfrm>
+            <a:off x="566928" y="1005840"/>
+            <a:ext cx="1371600" cy="25603"/>
+          </a:xfrm>
+          <a:prstGeom prst="rect">
+            <a:avLst/>
+          </a:prstGeom>
+          <a:solidFill>
+            <a:srgbClr val="0071E3"/>
+          </a:solidFill>
+          <a:ln/>
+        </p:spPr>
+      </p:sp>
+      <p:graphicFrame>
+        <p:nvGraphicFramePr>
+          <p:cNvPr id="16" name="Table 0"/>
+          <p:cNvGraphicFramePr>
+            <a:graphicFrameLocks noGrp="1"/>
+          </p:cNvGraphicFramePr>
+          <p:nvPr>
+            <p:extLst>
+              <p:ext uri="{D42A27DB-BD31-4B8C-83A1-F6EECF244321}">
+                <p14:modId xmlns:p14="http://schemas.microsoft.com/office/powerpoint/2010/main" val="1579011935"/>
+              </p:ext>
+            </p:extLst>
+          </p:nvPr>
+        </p:nvGraphicFramePr>
+        <p:xfrm>
+          <a:off x="566928" y="1225296"/>
+          <a:ext cx="11057839" cy="914400"/>
+        </p:xfrm>
+        <a:graphic>
+          <a:graphicData uri="http://schemas.openxmlformats.org/drawingml/2006/table">
+            <a:tbl>
+              <a:tblPr/>
+              <a:tblGrid>
+                <a:gridCol w="4179863"/>
+                <a:gridCol w="6877976"/>
+              </a:tblGrid>
+              <a:tr h="0">
+                <a:tc>
+                  <a:txBody>
+                    <a:bodyPr/>
+                    <a:lstStyle/>
+                    <a:p>
+                      <a:pPr indent="0" marL="0">
+                        <a:buNone/>
+                      </a:pPr>
+                      <a:r>
+                        <a:rPr lang="en-US" sz="1150" b="1" dirty="0">
+                          <a:solidFill>
+                            <a:srgbClr val="1D1D1F"/>
+                          </a:solidFill>
+                          <a:latin typeface="Inter" pitchFamily="34" charset="0"/>
+                          <a:ea typeface="Inter" pitchFamily="34" charset="-122"/>
+                          <a:cs typeface="Inter" pitchFamily="34" charset="-120"/>
+                        </a:rPr>
+                        <a:t>Parça</a:t>
+                      </a:r>
+                      <a:endParaRPr lang="en-US" sz="1150" dirty="0">
+                        <a:latin typeface="Inter" charset="0"/>
+                        <a:ea typeface="Inter" charset="0"/>
+                        <a:cs typeface="Inter" charset="0"/>
+                      </a:endParaRPr>
+                    </a:p>
+                  </a:txBody>
+                  <a:tcPr marL="114300" marR="114300" marT="76200" marB="76200" anchor="ctr">
+                    <a:lnL w="6350" cap="flat" cmpd="sng" algn="ctr">
+                      <a:solidFill>
+                        <a:srgbClr val="D8D8DC"/>
+                      </a:solidFill>
+                      <a:prstDash val="solid"/>
+                      <a:round/>
+                      <a:headEnd type="none" w="med" len="med"/>
+                      <a:tailEnd type="none" w="med" len="med"/>
+                    </a:lnL>
+                    <a:lnR w="6350" cap="flat" cmpd="sng" algn="ctr">
+                      <a:solidFill>
+                        <a:srgbClr val="D8D8DC"/>
+                      </a:solidFill>
+                      <a:prstDash val="solid"/>
+                      <a:round/>
+                      <a:headEnd type="none" w="med" len="med"/>
+                      <a:tailEnd type="none" w="med" len="med"/>
+                    </a:lnR>
+                    <a:lnT w="6350" cap="flat" cmpd="sng" algn="ctr">
+                      <a:solidFill>
+                        <a:srgbClr val="D8D8DC"/>
+                      </a:solidFill>
+                      <a:prstDash val="solid"/>
+                      <a:round/>
+                      <a:headEnd type="none" w="med" len="med"/>
+                      <a:tailEnd type="none" w="med" len="med"/>
+                    </a:lnT>
+                    <a:lnB w="6350" cap="flat" cmpd="sng" algn="ctr">
+                      <a:solidFill>
+                        <a:srgbClr val="D8D8DC"/>
+                      </a:solidFill>
+                      <a:prstDash val="solid"/>
+                      <a:round/>
+                      <a:headEnd type="none" w="med" len="med"/>
+                      <a:tailEnd type="none" w="med" len="med"/>
+                    </a:lnB>
+                    <a:solidFill>
+                      <a:srgbClr val="EEF4FD"/>
+                    </a:solidFill>
+                  </a:tcPr>
+                </a:tc>
+                <a:tc>
+                  <a:txBody>
+                    <a:bodyPr/>
+                    <a:lstStyle/>
+                    <a:p>
+                      <a:pPr indent="0" marL="0">
+                        <a:buNone/>
+                      </a:pPr>
+                      <a:r>
+                        <a:rPr lang="en-US" sz="1150" b="1" dirty="0">
+                          <a:solidFill>
+                            <a:srgbClr val="1D1D1F"/>
+                          </a:solidFill>
+                          <a:latin typeface="Inter" pitchFamily="34" charset="0"/>
+                          <a:ea typeface="Inter" pitchFamily="34" charset="-122"/>
+                          <a:cs typeface="Inter" pitchFamily="34" charset="-120"/>
+                        </a:rPr>
+                        <a:t>Kimden</a:t>
+                      </a:r>
+                      <a:endParaRPr lang="en-US" sz="1150" dirty="0">
+                        <a:latin typeface="Inter" charset="0"/>
+                        <a:ea typeface="Inter" charset="0"/>
+                        <a:cs typeface="Inter" charset="0"/>
+                      </a:endParaRPr>
+                    </a:p>
+                  </a:txBody>
+                  <a:tcPr marL="114300" marR="114300" marT="76200" marB="76200" anchor="ctr">
+                    <a:lnL w="6350" cap="flat" cmpd="sng" algn="ctr">
+                      <a:solidFill>
+                        <a:srgbClr val="D8D8DC"/>
+                      </a:solidFill>
+                      <a:prstDash val="solid"/>
+                      <a:round/>
+                      <a:headEnd type="none" w="med" len="med"/>
+                      <a:tailEnd type="none" w="med" len="med"/>
+                    </a:lnL>
+                    <a:lnR w="6350" cap="flat" cmpd="sng" algn="ctr">
+                      <a:solidFill>
+                        <a:srgbClr val="D8D8DC"/>
+                      </a:solidFill>
+                      <a:prstDash val="solid"/>
+                      <a:round/>
+                      <a:headEnd type="none" w="med" len="med"/>
+                      <a:tailEnd type="none" w="med" len="med"/>
+                    </a:lnR>
+                    <a:lnT w="6350" cap="flat" cmpd="sng" algn="ctr">
+                      <a:solidFill>
+                        <a:srgbClr val="D8D8DC"/>
+                      </a:solidFill>
+                      <a:prstDash val="solid"/>
+                      <a:round/>
+                      <a:headEnd type="none" w="med" len="med"/>
+                      <a:tailEnd type="none" w="med" len="med"/>
+                    </a:lnT>
+                    <a:lnB w="6350" cap="flat" cmpd="sng" algn="ctr">
+                      <a:solidFill>
+                        <a:srgbClr val="D8D8DC"/>
+                      </a:solidFill>
+                      <a:prstDash val="solid"/>
+                      <a:round/>
+                      <a:headEnd type="none" w="med" len="med"/>
+                      <a:tailEnd type="none" w="med" len="med"/>
+                    </a:lnB>
+                    <a:solidFill>
+                      <a:srgbClr val="EEF4FD"/>
+                    </a:solidFill>
+                  </a:tcPr>
+                </a:tc>
+              </a:tr>
+              <a:tr h="0">
+                <a:tc>
+                  <a:txBody>
+                    <a:bodyPr/>
+                    <a:lstStyle/>
+                    <a:p>
+                      <a:pPr indent="0" marL="0">
+                        <a:buNone/>
+                      </a:pPr>
+                      <a:r>
+                        <a:rPr lang="en-US" sz="1150" dirty="0">
+                          <a:solidFill>
+                            <a:srgbClr val="1D1D1F"/>
+                          </a:solidFill>
+                          <a:latin typeface="Inter" pitchFamily="34" charset="0"/>
+                          <a:ea typeface="Inter" pitchFamily="34" charset="-122"/>
+                          <a:cs typeface="Inter" pitchFamily="34" charset="-120"/>
+                        </a:rPr>
+                        <a:t>init + wait sidecar</a:t>
+                      </a:r>
+                      <a:endParaRPr lang="en-US" sz="1150" dirty="0">
+                        <a:latin typeface="Inter" charset="0"/>
+                        <a:ea typeface="Inter" charset="0"/>
+                        <a:cs typeface="Inter" charset="0"/>
+                      </a:endParaRPr>
+                    </a:p>
+                  </a:txBody>
+                  <a:tcPr marL="114300" marR="114300" marT="76200" marB="76200" anchor="ctr">
+                    <a:lnL w="6350" cap="flat" cmpd="sng" algn="ctr">
+                      <a:solidFill>
+                        <a:srgbClr val="D8D8DC"/>
+                      </a:solidFill>
+                      <a:prstDash val="solid"/>
+                      <a:round/>
+                      <a:headEnd type="none" w="med" len="med"/>
+                      <a:tailEnd type="none" w="med" len="med"/>
+                    </a:lnL>
+                    <a:lnR w="6350" cap="flat" cmpd="sng" algn="ctr">
+                      <a:solidFill>
+                        <a:srgbClr val="D8D8DC"/>
+                      </a:solidFill>
+                      <a:prstDash val="solid"/>
+                      <a:round/>
+                      <a:headEnd type="none" w="med" len="med"/>
+                      <a:tailEnd type="none" w="med" len="med"/>
+                    </a:lnR>
+                    <a:lnT w="6350" cap="flat" cmpd="sng" algn="ctr">
+                      <a:solidFill>
+                        <a:srgbClr val="D8D8DC"/>
+                      </a:solidFill>
+                      <a:prstDash val="solid"/>
+                      <a:round/>
+                      <a:headEnd type="none" w="med" len="med"/>
+                      <a:tailEnd type="none" w="med" len="med"/>
+                    </a:lnT>
+                    <a:lnB w="6350" cap="flat" cmpd="sng" algn="ctr">
+                      <a:solidFill>
+                        <a:srgbClr val="D8D8DC"/>
+                      </a:solidFill>
+                      <a:prstDash val="solid"/>
+                      <a:round/>
+                      <a:headEnd type="none" w="med" len="med"/>
+                      <a:tailEnd type="none" w="med" len="med"/>
+                    </a:lnB>
+                    <a:solidFill>
+                      <a:srgbClr val="FFFFFF"/>
+                    </a:solidFill>
+                  </a:tcPr>
+                </a:tc>
+                <a:tc>
+                  <a:txBody>
+                    <a:bodyPr/>
+                    <a:lstStyle/>
+                    <a:p>
+                      <a:pPr indent="0" marL="0">
+                        <a:buNone/>
+                      </a:pPr>
+                      <a:r>
+                        <a:rPr lang="en-US" sz="1150" b="1" dirty="0">
+                          <a:solidFill>
+                            <a:srgbClr val="1D1D1F"/>
+                          </a:solidFill>
+                          <a:latin typeface="Inter" pitchFamily="34" charset="0"/>
+                          <a:ea typeface="Inter" pitchFamily="34" charset="-122"/>
+                          <a:cs typeface="Inter" pitchFamily="34" charset="-120"/>
+                        </a:rPr>
+                        <a:t>Argo Workflows</a:t>
+                      </a:r>
+                      <a:endParaRPr lang="en-US" sz="1150" dirty="0">
+                        <a:latin typeface="Inter" charset="0"/>
+                        <a:ea typeface="Inter" charset="0"/>
+                        <a:cs typeface="Inter" charset="0"/>
+                      </a:endParaRPr>
+                    </a:p>
+                  </a:txBody>
+                  <a:tcPr marL="114300" marR="114300" marT="76200" marB="76200" anchor="ctr">
+                    <a:lnL w="6350" cap="flat" cmpd="sng" algn="ctr">
+                      <a:solidFill>
+                        <a:srgbClr val="D8D8DC"/>
+                      </a:solidFill>
+                      <a:prstDash val="solid"/>
+                      <a:round/>
+                      <a:headEnd type="none" w="med" len="med"/>
+                      <a:tailEnd type="none" w="med" len="med"/>
+                    </a:lnL>
+                    <a:lnR w="6350" cap="flat" cmpd="sng" algn="ctr">
+                      <a:solidFill>
+                        <a:srgbClr val="D8D8DC"/>
+                      </a:solidFill>
+                      <a:prstDash val="solid"/>
+                      <a:round/>
+                      <a:headEnd type="none" w="med" len="med"/>
+                      <a:tailEnd type="none" w="med" len="med"/>
+                    </a:lnR>
+                    <a:lnT w="6350" cap="flat" cmpd="sng" algn="ctr">
+                      <a:solidFill>
+                        <a:srgbClr val="D8D8DC"/>
+                      </a:solidFill>
+                      <a:prstDash val="solid"/>
+                      <a:round/>
+                      <a:headEnd type="none" w="med" len="med"/>
+                      <a:tailEnd type="none" w="med" len="med"/>
+                    </a:lnT>
+                    <a:lnB w="6350" cap="flat" cmpd="sng" algn="ctr">
+                      <a:solidFill>
+                        <a:srgbClr val="D8D8DC"/>
+                      </a:solidFill>
+                      <a:prstDash val="solid"/>
+                      <a:round/>
+                      <a:headEnd type="none" w="med" len="med"/>
+                      <a:tailEnd type="none" w="med" len="med"/>
+                    </a:lnB>
+                    <a:solidFill>
+                      <a:srgbClr val="FFFFFF"/>
+                    </a:solidFill>
+                  </a:tcPr>
+                </a:tc>
+              </a:tr>
+              <a:tr h="0">
+                <a:tc>
+                  <a:txBody>
+                    <a:bodyPr/>
+                    <a:lstStyle/>
+                    <a:p>
+                      <a:pPr indent="0" marL="0">
+                        <a:buNone/>
+                      </a:pPr>
+                      <a:r>
+                        <a:rPr lang="en-US" sz="1150" dirty="0">
+                          <a:solidFill>
+                            <a:srgbClr val="1D1D1F"/>
+                          </a:solidFill>
+                          <a:latin typeface="Inter" pitchFamily="34" charset="0"/>
+                          <a:ea typeface="Inter" pitchFamily="34" charset="-122"/>
+                          <a:cs typeface="Inter" pitchFamily="34" charset="-120"/>
+                        </a:rPr>
+                        <a:t>girdiyi kod başlamadan yerleştir</a:t>
+                      </a:r>
+                      <a:endParaRPr lang="en-US" sz="1150" dirty="0">
+                        <a:latin typeface="Inter" charset="0"/>
+                        <a:ea typeface="Inter" charset="0"/>
+                        <a:cs typeface="Inter" charset="0"/>
+                      </a:endParaRPr>
+                    </a:p>
+                  </a:txBody>
+                  <a:tcPr marL="114300" marR="114300" marT="76200" marB="76200" anchor="ctr">
+                    <a:lnL w="6350" cap="flat" cmpd="sng" algn="ctr">
+                      <a:solidFill>
+                        <a:srgbClr val="D8D8DC"/>
+                      </a:solidFill>
+                      <a:prstDash val="solid"/>
+                      <a:round/>
+                      <a:headEnd type="none" w="med" len="med"/>
+                      <a:tailEnd type="none" w="med" len="med"/>
+                    </a:lnL>
+                    <a:lnR w="6350" cap="flat" cmpd="sng" algn="ctr">
+                      <a:solidFill>
+                        <a:srgbClr val="D8D8DC"/>
+                      </a:solidFill>
+                      <a:prstDash val="solid"/>
+                      <a:round/>
+                      <a:headEnd type="none" w="med" len="med"/>
+                      <a:tailEnd type="none" w="med" len="med"/>
+                    </a:lnR>
+                    <a:lnT w="6350" cap="flat" cmpd="sng" algn="ctr">
+                      <a:solidFill>
+                        <a:srgbClr val="D8D8DC"/>
+                      </a:solidFill>
+                      <a:prstDash val="solid"/>
+                      <a:round/>
+                      <a:headEnd type="none" w="med" len="med"/>
+                      <a:tailEnd type="none" w="med" len="med"/>
+                    </a:lnT>
+                    <a:lnB w="6350" cap="flat" cmpd="sng" algn="ctr">
+                      <a:solidFill>
+                        <a:srgbClr val="D8D8DC"/>
+                      </a:solidFill>
+                      <a:prstDash val="solid"/>
+                      <a:round/>
+                      <a:headEnd type="none" w="med" len="med"/>
+                      <a:tailEnd type="none" w="med" len="med"/>
+                    </a:lnB>
+                    <a:solidFill>
+                      <a:srgbClr val="F5F5F7"/>
+                    </a:solidFill>
+                  </a:tcPr>
+                </a:tc>
+                <a:tc>
+                  <a:txBody>
+                    <a:bodyPr/>
+                    <a:lstStyle/>
+                    <a:p>
+                      <a:pPr indent="0" marL="0">
+                        <a:buNone/>
+                      </a:pPr>
+                      <a:r>
+                        <a:rPr lang="en-US" sz="1150" b="1" dirty="0">
+                          <a:solidFill>
+                            <a:srgbClr val="1D1D1F"/>
+                          </a:solidFill>
+                          <a:latin typeface="Inter" pitchFamily="34" charset="0"/>
+                          <a:ea typeface="Inter" pitchFamily="34" charset="-122"/>
+                          <a:cs typeface="Inter" pitchFamily="34" charset="-120"/>
+                        </a:rPr>
+                        <a:t>Argo `init` / KFP `driver`+`launcher`</a:t>
+                      </a:r>
+                      <a:endParaRPr lang="en-US" sz="1150" dirty="0">
+                        <a:latin typeface="Inter" charset="0"/>
+                        <a:ea typeface="Inter" charset="0"/>
+                        <a:cs typeface="Inter" charset="0"/>
+                      </a:endParaRPr>
+                    </a:p>
+                  </a:txBody>
+                  <a:tcPr marL="114300" marR="114300" marT="76200" marB="76200" anchor="ctr">
+                    <a:lnL w="6350" cap="flat" cmpd="sng" algn="ctr">
+                      <a:solidFill>
+                        <a:srgbClr val="D8D8DC"/>
+                      </a:solidFill>
+                      <a:prstDash val="solid"/>
+                      <a:round/>
+                      <a:headEnd type="none" w="med" len="med"/>
+                      <a:tailEnd type="none" w="med" len="med"/>
+                    </a:lnL>
+                    <a:lnR w="6350" cap="flat" cmpd="sng" algn="ctr">
+                      <a:solidFill>
+                        <a:srgbClr val="D8D8DC"/>
+                      </a:solidFill>
+                      <a:prstDash val="solid"/>
+                      <a:round/>
+                      <a:headEnd type="none" w="med" len="med"/>
+                      <a:tailEnd type="none" w="med" len="med"/>
+                    </a:lnR>
+                    <a:lnT w="6350" cap="flat" cmpd="sng" algn="ctr">
+                      <a:solidFill>
+                        <a:srgbClr val="D8D8DC"/>
+                      </a:solidFill>
+                      <a:prstDash val="solid"/>
+                      <a:round/>
+                      <a:headEnd type="none" w="med" len="med"/>
+                      <a:tailEnd type="none" w="med" len="med"/>
+                    </a:lnT>
+                    <a:lnB w="6350" cap="flat" cmpd="sng" algn="ctr">
+                      <a:solidFill>
+                        <a:srgbClr val="D8D8DC"/>
+                      </a:solidFill>
+                      <a:prstDash val="solid"/>
+                      <a:round/>
+                      <a:headEnd type="none" w="med" len="med"/>
+                      <a:tailEnd type="none" w="med" len="med"/>
+                    </a:lnB>
+                    <a:solidFill>
+                      <a:srgbClr val="F5F5F7"/>
+                    </a:solidFill>
+                  </a:tcPr>
+                </a:tc>
+              </a:tr>
+              <a:tr h="0">
+                <a:tc>
+                  <a:txBody>
+                    <a:bodyPr/>
+                    <a:lstStyle/>
+                    <a:p>
+                      <a:pPr indent="0" marL="0">
+                        <a:buNone/>
+                      </a:pPr>
+                      <a:r>
+                        <a:rPr lang="en-US" sz="1150" dirty="0">
+                          <a:solidFill>
+                            <a:srgbClr val="1D1D1F"/>
+                          </a:solidFill>
+                          <a:latin typeface="Inter" pitchFamily="34" charset="0"/>
+                          <a:ea typeface="Inter" pitchFamily="34" charset="-122"/>
+                          <a:cs typeface="Inter" pitchFamily="34" charset="-120"/>
+                        </a:rPr>
+                        <a:t>girdi beyanı · beyandan soy</a:t>
+                      </a:r>
+                      <a:endParaRPr lang="en-US" sz="1150" dirty="0">
+                        <a:latin typeface="Inter" charset="0"/>
+                        <a:ea typeface="Inter" charset="0"/>
+                        <a:cs typeface="Inter" charset="0"/>
+                      </a:endParaRPr>
+                    </a:p>
+                  </a:txBody>
+                  <a:tcPr marL="114300" marR="114300" marT="76200" marB="76200" anchor="ctr">
+                    <a:lnL w="6350" cap="flat" cmpd="sng" algn="ctr">
+                      <a:solidFill>
+                        <a:srgbClr val="D8D8DC"/>
+                      </a:solidFill>
+                      <a:prstDash val="solid"/>
+                      <a:round/>
+                      <a:headEnd type="none" w="med" len="med"/>
+                      <a:tailEnd type="none" w="med" len="med"/>
+                    </a:lnL>
+                    <a:lnR w="6350" cap="flat" cmpd="sng" algn="ctr">
+                      <a:solidFill>
+                        <a:srgbClr val="D8D8DC"/>
+                      </a:solidFill>
+                      <a:prstDash val="solid"/>
+                      <a:round/>
+                      <a:headEnd type="none" w="med" len="med"/>
+                      <a:tailEnd type="none" w="med" len="med"/>
+                    </a:lnR>
+                    <a:lnT w="6350" cap="flat" cmpd="sng" algn="ctr">
+                      <a:solidFill>
+                        <a:srgbClr val="D8D8DC"/>
+                      </a:solidFill>
+                      <a:prstDash val="solid"/>
+                      <a:round/>
+                      <a:headEnd type="none" w="med" len="med"/>
+                      <a:tailEnd type="none" w="med" len="med"/>
+                    </a:lnT>
+                    <a:lnB w="6350" cap="flat" cmpd="sng" algn="ctr">
+                      <a:solidFill>
+                        <a:srgbClr val="D8D8DC"/>
+                      </a:solidFill>
+                      <a:prstDash val="solid"/>
+                      <a:round/>
+                      <a:headEnd type="none" w="med" len="med"/>
+                      <a:tailEnd type="none" w="med" len="med"/>
+                    </a:lnB>
+                    <a:solidFill>
+                      <a:srgbClr val="FFFFFF"/>
+                    </a:solidFill>
+                  </a:tcPr>
+                </a:tc>
+                <a:tc>
+                  <a:txBody>
+                    <a:bodyPr/>
+                    <a:lstStyle/>
+                    <a:p>
+                      <a:pPr indent="0" marL="0">
+                        <a:buNone/>
+                      </a:pPr>
+                      <a:r>
+                        <a:rPr lang="en-US" sz="1150" b="1" dirty="0">
+                          <a:solidFill>
+                            <a:srgbClr val="1D1D1F"/>
+                          </a:solidFill>
+                          <a:latin typeface="Inter" pitchFamily="34" charset="0"/>
+                          <a:ea typeface="Inter" pitchFamily="34" charset="-122"/>
+                          <a:cs typeface="Inter" pitchFamily="34" charset="-120"/>
+                        </a:rPr>
+                        <a:t>Argo `inputs.artifacts` · MLMD `DECLARED_INPUT`</a:t>
+                      </a:r>
+                      <a:endParaRPr lang="en-US" sz="1150" dirty="0">
+                        <a:latin typeface="Inter" charset="0"/>
+                        <a:ea typeface="Inter" charset="0"/>
+                        <a:cs typeface="Inter" charset="0"/>
+                      </a:endParaRPr>
+                    </a:p>
+                  </a:txBody>
+                  <a:tcPr marL="114300" marR="114300" marT="76200" marB="76200" anchor="ctr">
+                    <a:lnL w="6350" cap="flat" cmpd="sng" algn="ctr">
+                      <a:solidFill>
+                        <a:srgbClr val="D8D8DC"/>
+                      </a:solidFill>
+                      <a:prstDash val="solid"/>
+                      <a:round/>
+                      <a:headEnd type="none" w="med" len="med"/>
+                      <a:tailEnd type="none" w="med" len="med"/>
+                    </a:lnL>
+                    <a:lnR w="6350" cap="flat" cmpd="sng" algn="ctr">
+                      <a:solidFill>
+                        <a:srgbClr val="D8D8DC"/>
+                      </a:solidFill>
+                      <a:prstDash val="solid"/>
+                      <a:round/>
+                      <a:headEnd type="none" w="med" len="med"/>
+                      <a:tailEnd type="none" w="med" len="med"/>
+                    </a:lnR>
+                    <a:lnT w="6350" cap="flat" cmpd="sng" algn="ctr">
+                      <a:solidFill>
+                        <a:srgbClr val="D8D8DC"/>
+                      </a:solidFill>
+                      <a:prstDash val="solid"/>
+                      <a:round/>
+                      <a:headEnd type="none" w="med" len="med"/>
+                      <a:tailEnd type="none" w="med" len="med"/>
+                    </a:lnT>
+                    <a:lnB w="6350" cap="flat" cmpd="sng" algn="ctr">
+                      <a:solidFill>
+                        <a:srgbClr val="D8D8DC"/>
+                      </a:solidFill>
+                      <a:prstDash val="solid"/>
+                      <a:round/>
+                      <a:headEnd type="none" w="med" len="med"/>
+                      <a:tailEnd type="none" w="med" len="med"/>
+                    </a:lnB>
+                    <a:solidFill>
+                      <a:srgbClr val="FFFFFF"/>
+                    </a:solidFill>
+                  </a:tcPr>
+                </a:tc>
+              </a:tr>
+              <a:tr h="0">
+                <a:tc>
+                  <a:txBody>
+                    <a:bodyPr/>
+                    <a:lstStyle/>
+                    <a:p>
+                      <a:pPr indent="0" marL="0">
+                        <a:buNone/>
+                      </a:pPr>
+                      <a:r>
+                        <a:rPr lang="en-US" sz="1150" dirty="0">
+                          <a:solidFill>
+                            <a:srgbClr val="1D1D1F"/>
+                          </a:solidFill>
+                          <a:latin typeface="Inter" pitchFamily="34" charset="0"/>
+                          <a:ea typeface="Inter" pitchFamily="34" charset="-122"/>
+                          <a:cs typeface="Inter" pitchFamily="34" charset="-120"/>
+                        </a:rPr>
+                        <a:t>run-scoped anahtar yolu · kayıt defteri</a:t>
+                      </a:r>
+                      <a:endParaRPr lang="en-US" sz="1150" dirty="0">
+                        <a:latin typeface="Inter" charset="0"/>
+                        <a:ea typeface="Inter" charset="0"/>
+                        <a:cs typeface="Inter" charset="0"/>
+                      </a:endParaRPr>
+                    </a:p>
+                  </a:txBody>
+                  <a:tcPr marL="114300" marR="114300" marT="76200" marB="76200" anchor="ctr">
+                    <a:lnL w="6350" cap="flat" cmpd="sng" algn="ctr">
+                      <a:solidFill>
+                        <a:srgbClr val="D8D8DC"/>
+                      </a:solidFill>
+                      <a:prstDash val="solid"/>
+                      <a:round/>
+                      <a:headEnd type="none" w="med" len="med"/>
+                      <a:tailEnd type="none" w="med" len="med"/>
+                    </a:lnL>
+                    <a:lnR w="6350" cap="flat" cmpd="sng" algn="ctr">
+                      <a:solidFill>
+                        <a:srgbClr val="D8D8DC"/>
+                      </a:solidFill>
+                      <a:prstDash val="solid"/>
+                      <a:round/>
+                      <a:headEnd type="none" w="med" len="med"/>
+                      <a:tailEnd type="none" w="med" len="med"/>
+                    </a:lnR>
+                    <a:lnT w="6350" cap="flat" cmpd="sng" algn="ctr">
+                      <a:solidFill>
+                        <a:srgbClr val="D8D8DC"/>
+                      </a:solidFill>
+                      <a:prstDash val="solid"/>
+                      <a:round/>
+                      <a:headEnd type="none" w="med" len="med"/>
+                      <a:tailEnd type="none" w="med" len="med"/>
+                    </a:lnT>
+                    <a:lnB w="6350" cap="flat" cmpd="sng" algn="ctr">
+                      <a:solidFill>
+                        <a:srgbClr val="D8D8DC"/>
+                      </a:solidFill>
+                      <a:prstDash val="solid"/>
+                      <a:round/>
+                      <a:headEnd type="none" w="med" len="med"/>
+                      <a:tailEnd type="none" w="med" len="med"/>
+                    </a:lnB>
+                    <a:solidFill>
+                      <a:srgbClr val="F5F5F7"/>
+                    </a:solidFill>
+                  </a:tcPr>
+                </a:tc>
+                <a:tc>
+                  <a:txBody>
+                    <a:bodyPr/>
+                    <a:lstStyle/>
+                    <a:p>
+                      <a:pPr indent="0" marL="0">
+                        <a:buNone/>
+                      </a:pPr>
+                      <a:r>
+                        <a:rPr lang="en-US" sz="1150" b="1" dirty="0">
+                          <a:solidFill>
+                            <a:srgbClr val="1D1D1F"/>
+                          </a:solidFill>
+                          <a:latin typeface="Inter" pitchFamily="34" charset="0"/>
+                          <a:ea typeface="Inter" pitchFamily="34" charset="-122"/>
+                          <a:cs typeface="Inter" pitchFamily="34" charset="-120"/>
+                        </a:rPr>
+                        <a:t>KFP `pipeline_root` · MLMD</a:t>
+                      </a:r>
+                      <a:endParaRPr lang="en-US" sz="1150" dirty="0">
+                        <a:latin typeface="Inter" charset="0"/>
+                        <a:ea typeface="Inter" charset="0"/>
+                        <a:cs typeface="Inter" charset="0"/>
+                      </a:endParaRPr>
+                    </a:p>
+                  </a:txBody>
+                  <a:tcPr marL="114300" marR="114300" marT="76200" marB="76200" anchor="ctr">
+                    <a:lnL w="6350" cap="flat" cmpd="sng" algn="ctr">
+                      <a:solidFill>
+                        <a:srgbClr val="D8D8DC"/>
+                      </a:solidFill>
+                      <a:prstDash val="solid"/>
+                      <a:round/>
+                      <a:headEnd type="none" w="med" len="med"/>
+                      <a:tailEnd type="none" w="med" len="med"/>
+                    </a:lnL>
+                    <a:lnR w="6350" cap="flat" cmpd="sng" algn="ctr">
+                      <a:solidFill>
+                        <a:srgbClr val="D8D8DC"/>
+                      </a:solidFill>
+                      <a:prstDash val="solid"/>
+                      <a:round/>
+                      <a:headEnd type="none" w="med" len="med"/>
+                      <a:tailEnd type="none" w="med" len="med"/>
+                    </a:lnR>
+                    <a:lnT w="6350" cap="flat" cmpd="sng" algn="ctr">
+                      <a:solidFill>
+                        <a:srgbClr val="D8D8DC"/>
+                      </a:solidFill>
+                      <a:prstDash val="solid"/>
+                      <a:round/>
+                      <a:headEnd type="none" w="med" len="med"/>
+                      <a:tailEnd type="none" w="med" len="med"/>
+                    </a:lnT>
+                    <a:lnB w="6350" cap="flat" cmpd="sng" algn="ctr">
+                      <a:solidFill>
+                        <a:srgbClr val="D8D8DC"/>
+                      </a:solidFill>
+                      <a:prstDash val="solid"/>
+                      <a:round/>
+                      <a:headEnd type="none" w="med" len="med"/>
+                      <a:tailEnd type="none" w="med" len="med"/>
+                    </a:lnB>
+                    <a:solidFill>
+                      <a:srgbClr val="F5F5F7"/>
+                    </a:solidFill>
+                  </a:tcPr>
+                </a:tc>
+              </a:tr>
+              <a:tr h="0">
+                <a:tc>
+                  <a:txBody>
+                    <a:bodyPr/>
+                    <a:lstStyle/>
+                    <a:p>
+                      <a:pPr indent="0" marL="0">
+                        <a:buNone/>
+                      </a:pPr>
+                      <a:r>
+                        <a:rPr lang="en-US" sz="1150" dirty="0">
+                          <a:solidFill>
+                            <a:srgbClr val="1D1D1F"/>
+                          </a:solidFill>
+                          <a:latin typeface="Inter" pitchFamily="34" charset="0"/>
+                          <a:ea typeface="Inter" pitchFamily="34" charset="-122"/>
+                          <a:cs typeface="Inter" pitchFamily="34" charset="-120"/>
+                        </a:rPr>
+                        <a:t>künye süzgeci · sürüm alias'ı</a:t>
+                      </a:r>
+                      <a:endParaRPr lang="en-US" sz="1150" dirty="0">
+                        <a:latin typeface="Inter" charset="0"/>
+                        <a:ea typeface="Inter" charset="0"/>
+                        <a:cs typeface="Inter" charset="0"/>
+                      </a:endParaRPr>
+                    </a:p>
+                  </a:txBody>
+                  <a:tcPr marL="114300" marR="114300" marT="76200" marB="76200" anchor="ctr">
+                    <a:lnL w="6350" cap="flat" cmpd="sng" algn="ctr">
+                      <a:solidFill>
+                        <a:srgbClr val="D8D8DC"/>
+                      </a:solidFill>
+                      <a:prstDash val="solid"/>
+                      <a:round/>
+                      <a:headEnd type="none" w="med" len="med"/>
+                      <a:tailEnd type="none" w="med" len="med"/>
+                    </a:lnL>
+                    <a:lnR w="6350" cap="flat" cmpd="sng" algn="ctr">
+                      <a:solidFill>
+                        <a:srgbClr val="D8D8DC"/>
+                      </a:solidFill>
+                      <a:prstDash val="solid"/>
+                      <a:round/>
+                      <a:headEnd type="none" w="med" len="med"/>
+                      <a:tailEnd type="none" w="med" len="med"/>
+                    </a:lnR>
+                    <a:lnT w="6350" cap="flat" cmpd="sng" algn="ctr">
+                      <a:solidFill>
+                        <a:srgbClr val="D8D8DC"/>
+                      </a:solidFill>
+                      <a:prstDash val="solid"/>
+                      <a:round/>
+                      <a:headEnd type="none" w="med" len="med"/>
+                      <a:tailEnd type="none" w="med" len="med"/>
+                    </a:lnT>
+                    <a:lnB w="6350" cap="flat" cmpd="sng" algn="ctr">
+                      <a:solidFill>
+                        <a:srgbClr val="D8D8DC"/>
+                      </a:solidFill>
+                      <a:prstDash val="solid"/>
+                      <a:round/>
+                      <a:headEnd type="none" w="med" len="med"/>
+                      <a:tailEnd type="none" w="med" len="med"/>
+                    </a:lnB>
+                    <a:solidFill>
+                      <a:srgbClr val="FFFFFF"/>
+                    </a:solidFill>
+                  </a:tcPr>
+                </a:tc>
+                <a:tc>
+                  <a:txBody>
+                    <a:bodyPr/>
+                    <a:lstStyle/>
+                    <a:p>
+                      <a:pPr indent="0" marL="0">
+                        <a:buNone/>
+                      </a:pPr>
+                      <a:r>
+                        <a:rPr lang="en-US" sz="1150" b="1" dirty="0">
+                          <a:solidFill>
+                            <a:srgbClr val="1D1D1F"/>
+                          </a:solidFill>
+                          <a:latin typeface="Inter" pitchFamily="34" charset="0"/>
+                          <a:ea typeface="Inter" pitchFamily="34" charset="-122"/>
+                          <a:cs typeface="Inter" pitchFamily="34" charset="-120"/>
+                        </a:rPr>
+                        <a:t>MLMD `filter_query` · MLflow Model Registry</a:t>
+                      </a:r>
+                      <a:endParaRPr lang="en-US" sz="1150" dirty="0">
+                        <a:latin typeface="Inter" charset="0"/>
+                        <a:ea typeface="Inter" charset="0"/>
+                        <a:cs typeface="Inter" charset="0"/>
+                      </a:endParaRPr>
+                    </a:p>
+                  </a:txBody>
+                  <a:tcPr marL="114300" marR="114300" marT="76200" marB="76200" anchor="ctr">
+                    <a:lnL w="6350" cap="flat" cmpd="sng" algn="ctr">
+                      <a:solidFill>
+                        <a:srgbClr val="D8D8DC"/>
+                      </a:solidFill>
+                      <a:prstDash val="solid"/>
+                      <a:round/>
+                      <a:headEnd type="none" w="med" len="med"/>
+                      <a:tailEnd type="none" w="med" len="med"/>
+                    </a:lnL>
+                    <a:lnR w="6350" cap="flat" cmpd="sng" algn="ctr">
+                      <a:solidFill>
+                        <a:srgbClr val="D8D8DC"/>
+                      </a:solidFill>
+                      <a:prstDash val="solid"/>
+                      <a:round/>
+                      <a:headEnd type="none" w="med" len="med"/>
+                      <a:tailEnd type="none" w="med" len="med"/>
+                    </a:lnR>
+                    <a:lnT w="6350" cap="flat" cmpd="sng" algn="ctr">
+                      <a:solidFill>
+                        <a:srgbClr val="D8D8DC"/>
+                      </a:solidFill>
+                      <a:prstDash val="solid"/>
+                      <a:round/>
+                      <a:headEnd type="none" w="med" len="med"/>
+                      <a:tailEnd type="none" w="med" len="med"/>
+                    </a:lnT>
+                    <a:lnB w="6350" cap="flat" cmpd="sng" algn="ctr">
+                      <a:solidFill>
+                        <a:srgbClr val="D8D8DC"/>
+                      </a:solidFill>
+                      <a:prstDash val="solid"/>
+                      <a:round/>
+                      <a:headEnd type="none" w="med" len="med"/>
+                      <a:tailEnd type="none" w="med" len="med"/>
+                    </a:lnB>
+                    <a:solidFill>
+                      <a:srgbClr val="FFFFFF"/>
+                    </a:solidFill>
+                  </a:tcPr>
+                </a:tc>
+              </a:tr>
+              <a:tr h="0">
+                <a:tc>
+                  <a:txBody>
+                    <a:bodyPr/>
+                    <a:lstStyle/>
+                    <a:p>
+                      <a:pPr indent="0" marL="0">
+                        <a:buNone/>
+                      </a:pPr>
+                      <a:r>
+                        <a:rPr lang="en-US" sz="1150" dirty="0">
+                          <a:solidFill>
+                            <a:srgbClr val="1D1D1F"/>
+                          </a:solidFill>
+                          <a:latin typeface="Inter" pitchFamily="34" charset="0"/>
+                          <a:ea typeface="Inter" pitchFamily="34" charset="-122"/>
+                          <a:cs typeface="Inter" pitchFamily="34" charset="-120"/>
+                        </a:rPr>
+                        <a:t>isimler prompt'ta</a:t>
+                      </a:r>
+                      <a:endParaRPr lang="en-US" sz="1150" dirty="0">
+                        <a:latin typeface="Inter" charset="0"/>
+                        <a:ea typeface="Inter" charset="0"/>
+                        <a:cs typeface="Inter" charset="0"/>
+                      </a:endParaRPr>
+                    </a:p>
+                  </a:txBody>
+                  <a:tcPr marL="114300" marR="114300" marT="76200" marB="76200" anchor="ctr">
+                    <a:lnL w="6350" cap="flat" cmpd="sng" algn="ctr">
+                      <a:solidFill>
+                        <a:srgbClr val="D8D8DC"/>
+                      </a:solidFill>
+                      <a:prstDash val="solid"/>
+                      <a:round/>
+                      <a:headEnd type="none" w="med" len="med"/>
+                      <a:tailEnd type="none" w="med" len="med"/>
+                    </a:lnL>
+                    <a:lnR w="6350" cap="flat" cmpd="sng" algn="ctr">
+                      <a:solidFill>
+                        <a:srgbClr val="D8D8DC"/>
+                      </a:solidFill>
+                      <a:prstDash val="solid"/>
+                      <a:round/>
+                      <a:headEnd type="none" w="med" len="med"/>
+                      <a:tailEnd type="none" w="med" len="med"/>
+                    </a:lnR>
+                    <a:lnT w="6350" cap="flat" cmpd="sng" algn="ctr">
+                      <a:solidFill>
+                        <a:srgbClr val="D8D8DC"/>
+                      </a:solidFill>
+                      <a:prstDash val="solid"/>
+                      <a:round/>
+                      <a:headEnd type="none" w="med" len="med"/>
+                      <a:tailEnd type="none" w="med" len="med"/>
+                    </a:lnT>
+                    <a:lnB w="6350" cap="flat" cmpd="sng" algn="ctr">
+                      <a:solidFill>
+                        <a:srgbClr val="D8D8DC"/>
+                      </a:solidFill>
+                      <a:prstDash val="solid"/>
+                      <a:round/>
+                      <a:headEnd type="none" w="med" len="med"/>
+                      <a:tailEnd type="none" w="med" len="med"/>
+                    </a:lnB>
+                    <a:solidFill>
+                      <a:srgbClr val="F5F5F7"/>
+                    </a:solidFill>
+                  </a:tcPr>
+                </a:tc>
+                <a:tc>
+                  <a:txBody>
+                    <a:bodyPr/>
+                    <a:lstStyle/>
+                    <a:p>
+                      <a:pPr indent="0" marL="0">
+                        <a:buNone/>
+                      </a:pPr>
+                      <a:r>
+                        <a:rPr lang="en-US" sz="1150" b="1" dirty="0">
+                          <a:solidFill>
+                            <a:srgbClr val="1D1D1F"/>
+                          </a:solidFill>
+                          <a:latin typeface="Inter" pitchFamily="34" charset="0"/>
+                          <a:ea typeface="Inter" pitchFamily="34" charset="-122"/>
+                          <a:cs typeface="Inter" pitchFamily="34" charset="-120"/>
+                        </a:rPr>
+                        <a:t>Google ADK `LoadArtifactsTool`</a:t>
+                      </a:r>
+                      <a:endParaRPr lang="en-US" sz="1150" dirty="0">
+                        <a:latin typeface="Inter" charset="0"/>
+                        <a:ea typeface="Inter" charset="0"/>
+                        <a:cs typeface="Inter" charset="0"/>
+                      </a:endParaRPr>
+                    </a:p>
+                  </a:txBody>
+                  <a:tcPr marL="114300" marR="114300" marT="76200" marB="76200" anchor="ctr">
+                    <a:lnL w="6350" cap="flat" cmpd="sng" algn="ctr">
+                      <a:solidFill>
+                        <a:srgbClr val="D8D8DC"/>
+                      </a:solidFill>
+                      <a:prstDash val="solid"/>
+                      <a:round/>
+                      <a:headEnd type="none" w="med" len="med"/>
+                      <a:tailEnd type="none" w="med" len="med"/>
+                    </a:lnL>
+                    <a:lnR w="6350" cap="flat" cmpd="sng" algn="ctr">
+                      <a:solidFill>
+                        <a:srgbClr val="D8D8DC"/>
+                      </a:solidFill>
+                      <a:prstDash val="solid"/>
+                      <a:round/>
+                      <a:headEnd type="none" w="med" len="med"/>
+                      <a:tailEnd type="none" w="med" len="med"/>
+                    </a:lnR>
+                    <a:lnT w="6350" cap="flat" cmpd="sng" algn="ctr">
+                      <a:solidFill>
+                        <a:srgbClr val="D8D8DC"/>
+                      </a:solidFill>
+                      <a:prstDash val="solid"/>
+                      <a:round/>
+                      <a:headEnd type="none" w="med" len="med"/>
+                      <a:tailEnd type="none" w="med" len="med"/>
+                    </a:lnT>
+                    <a:lnB w="6350" cap="flat" cmpd="sng" algn="ctr">
+                      <a:solidFill>
+                        <a:srgbClr val="D8D8DC"/>
+                      </a:solidFill>
+                      <a:prstDash val="solid"/>
+                      <a:round/>
+                      <a:headEnd type="none" w="med" len="med"/>
+                      <a:tailEnd type="none" w="med" len="med"/>
+                    </a:lnB>
+                    <a:solidFill>
+                      <a:srgbClr val="F5F5F7"/>
+                    </a:solidFill>
+                  </a:tcPr>
+                </a:tc>
+              </a:tr>
+              <a:tr h="0">
+                <a:tc>
+                  <a:txBody>
+                    <a:bodyPr/>
+                    <a:lstStyle/>
+                    <a:p>
+                      <a:pPr indent="0" marL="0">
+                        <a:buNone/>
+                      </a:pPr>
+                      <a:r>
+                        <a:rPr lang="en-US" sz="1150" dirty="0">
+                          <a:solidFill>
+                            <a:srgbClr val="1D1D1F"/>
+                          </a:solidFill>
+                          <a:latin typeface="Inter" pitchFamily="34" charset="0"/>
+                          <a:ea typeface="Inter" pitchFamily="34" charset="-122"/>
+                          <a:cs typeface="Inter" pitchFamily="34" charset="-120"/>
+                        </a:rPr>
+                        <a:t>bayt yolu · </a:t>
+                      </a:r>
+                      <a:pPr indent="0" marL="0">
+                        <a:buNone/>
+                      </a:pPr>
+                      <a:r>
+                        <a:rPr lang="en-US" sz="1150" dirty="0">
+                          <a:solidFill>
+                            <a:srgbClr val="0071E3"/>
+                          </a:solidFill>
+                          <a:latin typeface="JetBrains Mono" pitchFamily="34" charset="0"/>
+                          <a:ea typeface="JetBrains Mono" pitchFamily="34" charset="-122"/>
+                          <a:cs typeface="JetBrains Mono" pitchFamily="34" charset="-120"/>
+                        </a:rPr>
+                        <a:t>proxy</a:t>
+                      </a:r>
+                      <a:endParaRPr lang="en-US" sz="1150" dirty="0">
+                        <a:latin typeface="Inter" charset="0"/>
+                        <a:ea typeface="Inter" charset="0"/>
+                        <a:cs typeface="Inter" charset="0"/>
+                      </a:endParaRPr>
+                    </a:p>
+                  </a:txBody>
+                  <a:tcPr marL="114300" marR="114300" marT="76200" marB="76200" anchor="ctr">
+                    <a:lnL w="6350" cap="flat" cmpd="sng" algn="ctr">
+                      <a:solidFill>
+                        <a:srgbClr val="D8D8DC"/>
+                      </a:solidFill>
+                      <a:prstDash val="solid"/>
+                      <a:round/>
+                      <a:headEnd type="none" w="med" len="med"/>
+                      <a:tailEnd type="none" w="med" len="med"/>
+                    </a:lnL>
+                    <a:lnR w="6350" cap="flat" cmpd="sng" algn="ctr">
+                      <a:solidFill>
+                        <a:srgbClr val="D8D8DC"/>
+                      </a:solidFill>
+                      <a:prstDash val="solid"/>
+                      <a:round/>
+                      <a:headEnd type="none" w="med" len="med"/>
+                      <a:tailEnd type="none" w="med" len="med"/>
+                    </a:lnR>
+                    <a:lnT w="6350" cap="flat" cmpd="sng" algn="ctr">
+                      <a:solidFill>
+                        <a:srgbClr val="D8D8DC"/>
+                      </a:solidFill>
+                      <a:prstDash val="solid"/>
+                      <a:round/>
+                      <a:headEnd type="none" w="med" len="med"/>
+                      <a:tailEnd type="none" w="med" len="med"/>
+                    </a:lnT>
+                    <a:lnB w="6350" cap="flat" cmpd="sng" algn="ctr">
+                      <a:solidFill>
+                        <a:srgbClr val="D8D8DC"/>
+                      </a:solidFill>
+                      <a:prstDash val="solid"/>
+                      <a:round/>
+                      <a:headEnd type="none" w="med" len="med"/>
+                      <a:tailEnd type="none" w="med" len="med"/>
+                    </a:lnB>
+                    <a:solidFill>
+                      <a:srgbClr val="FFFFFF"/>
+                    </a:solidFill>
+                  </a:tcPr>
+                </a:tc>
+                <a:tc>
+                  <a:txBody>
+                    <a:bodyPr/>
+                    <a:lstStyle/>
+                    <a:p>
+                      <a:pPr indent="0" marL="0">
+                        <a:buNone/>
+                      </a:pPr>
+                      <a:r>
+                        <a:rPr lang="en-US" sz="1150" b="1" dirty="0">
+                          <a:solidFill>
+                            <a:srgbClr val="1D1D1F"/>
+                          </a:solidFill>
+                          <a:latin typeface="Inter" pitchFamily="34" charset="0"/>
+                          <a:ea typeface="Inter" pitchFamily="34" charset="-122"/>
+                          <a:cs typeface="Inter" pitchFamily="34" charset="-120"/>
+                        </a:rPr>
+                        <a:t>MLflow</a:t>
+                      </a:r>
+                      <a:pPr indent="0" marL="0">
+                        <a:buNone/>
+                      </a:pPr>
+                      <a:r>
+                        <a:rPr lang="en-US" sz="1150" dirty="0">
+                          <a:solidFill>
+                            <a:srgbClr val="1D1D1F"/>
+                          </a:solidFill>
+                          <a:latin typeface="Inter" pitchFamily="34" charset="0"/>
+                          <a:ea typeface="Inter" pitchFamily="34" charset="-122"/>
+                          <a:cs typeface="Inter" pitchFamily="34" charset="-120"/>
+                        </a:rPr>
+                        <a:t> proxied artifact access</a:t>
+                      </a:r>
+                      <a:endParaRPr lang="en-US" sz="1150" dirty="0">
+                        <a:latin typeface="Inter" charset="0"/>
+                        <a:ea typeface="Inter" charset="0"/>
+                        <a:cs typeface="Inter" charset="0"/>
+                      </a:endParaRPr>
+                    </a:p>
+                  </a:txBody>
+                  <a:tcPr marL="114300" marR="114300" marT="76200" marB="76200" anchor="ctr">
+                    <a:lnL w="6350" cap="flat" cmpd="sng" algn="ctr">
+                      <a:solidFill>
+                        <a:srgbClr val="D8D8DC"/>
+                      </a:solidFill>
+                      <a:prstDash val="solid"/>
+                      <a:round/>
+                      <a:headEnd type="none" w="med" len="med"/>
+                      <a:tailEnd type="none" w="med" len="med"/>
+                    </a:lnL>
+                    <a:lnR w="6350" cap="flat" cmpd="sng" algn="ctr">
+                      <a:solidFill>
+                        <a:srgbClr val="D8D8DC"/>
+                      </a:solidFill>
+                      <a:prstDash val="solid"/>
+                      <a:round/>
+                      <a:headEnd type="none" w="med" len="med"/>
+                      <a:tailEnd type="none" w="med" len="med"/>
+                    </a:lnR>
+                    <a:lnT w="6350" cap="flat" cmpd="sng" algn="ctr">
+                      <a:solidFill>
+                        <a:srgbClr val="D8D8DC"/>
+                      </a:solidFill>
+                      <a:prstDash val="solid"/>
+                      <a:round/>
+                      <a:headEnd type="none" w="med" len="med"/>
+                      <a:tailEnd type="none" w="med" len="med"/>
+                    </a:lnT>
+                    <a:lnB w="6350" cap="flat" cmpd="sng" algn="ctr">
+                      <a:solidFill>
+                        <a:srgbClr val="D8D8DC"/>
+                      </a:solidFill>
+                      <a:prstDash val="solid"/>
+                      <a:round/>
+                      <a:headEnd type="none" w="med" len="med"/>
+                      <a:tailEnd type="none" w="med" len="med"/>
+                    </a:lnB>
+                    <a:solidFill>
+                      <a:srgbClr val="FFFFFF"/>
+                    </a:solidFill>
+                  </a:tcPr>
+                </a:tc>
+              </a:tr>
+              <a:tr h="0">
+                <a:tc>
+                  <a:txBody>
+                    <a:bodyPr/>
+                    <a:lstStyle/>
+                    <a:p>
+                      <a:pPr indent="0" marL="0">
+                        <a:buNone/>
+                      </a:pPr>
+                      <a:r>
+                        <a:rPr lang="en-US" sz="1150" dirty="0">
+                          <a:solidFill>
+                            <a:srgbClr val="1D1D1F"/>
+                          </a:solidFill>
+                          <a:latin typeface="Inter" pitchFamily="34" charset="0"/>
+                          <a:ea typeface="Inter" pitchFamily="34" charset="-122"/>
+                          <a:cs typeface="Inter" pitchFamily="34" charset="-120"/>
+                        </a:rPr>
+                        <a:t>bayt yolu · </a:t>
+                      </a:r>
+                      <a:pPr indent="0" marL="0">
+                        <a:buNone/>
+                      </a:pPr>
+                      <a:r>
+                        <a:rPr lang="en-US" sz="1150" dirty="0">
+                          <a:solidFill>
+                            <a:srgbClr val="0071E3"/>
+                          </a:solidFill>
+                          <a:latin typeface="JetBrains Mono" pitchFamily="34" charset="0"/>
+                          <a:ea typeface="JetBrains Mono" pitchFamily="34" charset="-122"/>
+                          <a:cs typeface="JetBrains Mono" pitchFamily="34" charset="-120"/>
+                        </a:rPr>
+                        <a:t>direct</a:t>
+                      </a:r>
+                      <a:endParaRPr lang="en-US" sz="1150" dirty="0">
+                        <a:latin typeface="Inter" charset="0"/>
+                        <a:ea typeface="Inter" charset="0"/>
+                        <a:cs typeface="Inter" charset="0"/>
+                      </a:endParaRPr>
+                    </a:p>
+                  </a:txBody>
+                  <a:tcPr marL="114300" marR="114300" marT="76200" marB="76200" anchor="ctr">
+                    <a:lnL w="6350" cap="flat" cmpd="sng" algn="ctr">
+                      <a:solidFill>
+                        <a:srgbClr val="D8D8DC"/>
+                      </a:solidFill>
+                      <a:prstDash val="solid"/>
+                      <a:round/>
+                      <a:headEnd type="none" w="med" len="med"/>
+                      <a:tailEnd type="none" w="med" len="med"/>
+                    </a:lnL>
+                    <a:lnR w="6350" cap="flat" cmpd="sng" algn="ctr">
+                      <a:solidFill>
+                        <a:srgbClr val="D8D8DC"/>
+                      </a:solidFill>
+                      <a:prstDash val="solid"/>
+                      <a:round/>
+                      <a:headEnd type="none" w="med" len="med"/>
+                      <a:tailEnd type="none" w="med" len="med"/>
+                    </a:lnR>
+                    <a:lnT w="6350" cap="flat" cmpd="sng" algn="ctr">
+                      <a:solidFill>
+                        <a:srgbClr val="D8D8DC"/>
+                      </a:solidFill>
+                      <a:prstDash val="solid"/>
+                      <a:round/>
+                      <a:headEnd type="none" w="med" len="med"/>
+                      <a:tailEnd type="none" w="med" len="med"/>
+                    </a:lnT>
+                    <a:lnB w="6350" cap="flat" cmpd="sng" algn="ctr">
+                      <a:solidFill>
+                        <a:srgbClr val="D8D8DC"/>
+                      </a:solidFill>
+                      <a:prstDash val="solid"/>
+                      <a:round/>
+                      <a:headEnd type="none" w="med" len="med"/>
+                      <a:tailEnd type="none" w="med" len="med"/>
+                    </a:lnB>
+                    <a:solidFill>
+                      <a:srgbClr val="F5F5F7"/>
+                    </a:solidFill>
+                  </a:tcPr>
+                </a:tc>
+                <a:tc>
+                  <a:txBody>
+                    <a:bodyPr/>
+                    <a:lstStyle/>
+                    <a:p>
+                      <a:pPr indent="0" marL="0">
+                        <a:buNone/>
+                      </a:pPr>
+                      <a:r>
+                        <a:rPr lang="en-US" sz="1150" b="1" dirty="0">
+                          <a:solidFill>
+                            <a:srgbClr val="1D1D1F"/>
+                          </a:solidFill>
+                          <a:latin typeface="Inter" pitchFamily="34" charset="0"/>
+                          <a:ea typeface="Inter" pitchFamily="34" charset="-122"/>
+                          <a:cs typeface="Inter" pitchFamily="34" charset="-120"/>
+                        </a:rPr>
+                        <a:t>KFP / Argo</a:t>
+                      </a:r>
+                      <a:pPr indent="0" marL="0">
+                        <a:buNone/>
+                      </a:pPr>
+                      <a:r>
+                        <a:rPr lang="en-US" sz="1150" dirty="0">
+                          <a:solidFill>
+                            <a:srgbClr val="1D1D1F"/>
+                          </a:solidFill>
+                          <a:latin typeface="Inter" pitchFamily="34" charset="0"/>
+                          <a:ea typeface="Inter" pitchFamily="34" charset="-122"/>
+                          <a:cs typeface="Inter" pitchFamily="34" charset="-120"/>
+                        </a:rPr>
+                        <a:t> — bayt depoya, künye kayıt defterine</a:t>
+                      </a:r>
+                      <a:endParaRPr lang="en-US" sz="1150" dirty="0">
+                        <a:latin typeface="Inter" charset="0"/>
+                        <a:ea typeface="Inter" charset="0"/>
+                        <a:cs typeface="Inter" charset="0"/>
+                      </a:endParaRPr>
+                    </a:p>
+                  </a:txBody>
+                  <a:tcPr marL="114300" marR="114300" marT="76200" marB="76200" anchor="ctr">
+                    <a:lnL w="6350" cap="flat" cmpd="sng" algn="ctr">
+                      <a:solidFill>
+                        <a:srgbClr val="D8D8DC"/>
+                      </a:solidFill>
+                      <a:prstDash val="solid"/>
+                      <a:round/>
+                      <a:headEnd type="none" w="med" len="med"/>
+                      <a:tailEnd type="none" w="med" len="med"/>
+                    </a:lnL>
+                    <a:lnR w="6350" cap="flat" cmpd="sng" algn="ctr">
+                      <a:solidFill>
+                        <a:srgbClr val="D8D8DC"/>
+                      </a:solidFill>
+                      <a:prstDash val="solid"/>
+                      <a:round/>
+                      <a:headEnd type="none" w="med" len="med"/>
+                      <a:tailEnd type="none" w="med" len="med"/>
+                    </a:lnR>
+                    <a:lnT w="6350" cap="flat" cmpd="sng" algn="ctr">
+                      <a:solidFill>
+                        <a:srgbClr val="D8D8DC"/>
+                      </a:solidFill>
+                      <a:prstDash val="solid"/>
+                      <a:round/>
+                      <a:headEnd type="none" w="med" len="med"/>
+                      <a:tailEnd type="none" w="med" len="med"/>
+                    </a:lnT>
+                    <a:lnB w="6350" cap="flat" cmpd="sng" algn="ctr">
+                      <a:solidFill>
+                        <a:srgbClr val="D8D8DC"/>
+                      </a:solidFill>
+                      <a:prstDash val="solid"/>
+                      <a:round/>
+                      <a:headEnd type="none" w="med" len="med"/>
+                      <a:tailEnd type="none" w="med" len="med"/>
+                    </a:lnB>
+                    <a:solidFill>
+                      <a:srgbClr val="F5F5F7"/>
+                    </a:solidFill>
+                  </a:tcPr>
+                </a:tc>
+              </a:tr>
+              <a:tr h="0">
+                <a:tc>
+                  <a:txBody>
+                    <a:bodyPr/>
+                    <a:lstStyle/>
+                    <a:p>
+                      <a:pPr indent="0" marL="0">
+                        <a:buNone/>
+                      </a:pPr>
+                      <a:r>
+                        <a:rPr lang="en-US" sz="1150" b="1" dirty="0">
+                          <a:solidFill>
+                            <a:srgbClr val="1D1D1F"/>
+                          </a:solidFill>
+                          <a:latin typeface="Inter" pitchFamily="34" charset="0"/>
+                          <a:ea typeface="Inter" pitchFamily="34" charset="-122"/>
+                          <a:cs typeface="Inter" pitchFamily="34" charset="-120"/>
+                        </a:rPr>
+                        <a:t>sandbox'ta sıfır ağ çağrısı</a:t>
+                      </a:r>
+                      <a:endParaRPr lang="en-US" sz="1150" dirty="0">
+                        <a:latin typeface="Inter" charset="0"/>
+                        <a:ea typeface="Inter" charset="0"/>
+                        <a:cs typeface="Inter" charset="0"/>
+                      </a:endParaRPr>
+                    </a:p>
+                  </a:txBody>
+                  <a:tcPr marL="114300" marR="114300" marT="76200" marB="76200" anchor="ctr">
+                    <a:lnL w="6350" cap="flat" cmpd="sng" algn="ctr">
+                      <a:solidFill>
+                        <a:srgbClr val="D8D8DC"/>
+                      </a:solidFill>
+                      <a:prstDash val="solid"/>
+                      <a:round/>
+                      <a:headEnd type="none" w="med" len="med"/>
+                      <a:tailEnd type="none" w="med" len="med"/>
+                    </a:lnL>
+                    <a:lnR w="6350" cap="flat" cmpd="sng" algn="ctr">
+                      <a:solidFill>
+                        <a:srgbClr val="D8D8DC"/>
+                      </a:solidFill>
+                      <a:prstDash val="solid"/>
+                      <a:round/>
+                      <a:headEnd type="none" w="med" len="med"/>
+                      <a:tailEnd type="none" w="med" len="med"/>
+                    </a:lnR>
+                    <a:lnT w="6350" cap="flat" cmpd="sng" algn="ctr">
+                      <a:solidFill>
+                        <a:srgbClr val="D8D8DC"/>
+                      </a:solidFill>
+                      <a:prstDash val="solid"/>
+                      <a:round/>
+                      <a:headEnd type="none" w="med" len="med"/>
+                      <a:tailEnd type="none" w="med" len="med"/>
+                    </a:lnT>
+                    <a:lnB w="6350" cap="flat" cmpd="sng" algn="ctr">
+                      <a:solidFill>
+                        <a:srgbClr val="D8D8DC"/>
+                      </a:solidFill>
+                      <a:prstDash val="solid"/>
+                      <a:round/>
+                      <a:headEnd type="none" w="med" len="med"/>
+                      <a:tailEnd type="none" w="med" len="med"/>
+                    </a:lnB>
+                    <a:solidFill>
+                      <a:srgbClr val="FFFFFF"/>
+                    </a:solidFill>
+                  </a:tcPr>
+                </a:tc>
+                <a:tc>
+                  <a:txBody>
+                    <a:bodyPr/>
+                    <a:lstStyle/>
+                    <a:p>
+                      <a:pPr indent="0" marL="0">
+                        <a:buNone/>
+                      </a:pPr>
+                      <a:r>
+                        <a:rPr lang="en-US" sz="1150" b="1" dirty="0">
+                          <a:solidFill>
+                            <a:srgbClr val="1D1D1F"/>
+                          </a:solidFill>
+                          <a:latin typeface="Inter" pitchFamily="34" charset="0"/>
+                          <a:ea typeface="Inter" pitchFamily="34" charset="-122"/>
+                          <a:cs typeface="Inter" pitchFamily="34" charset="-120"/>
+                        </a:rPr>
+                        <a:t>KFP</a:t>
+                      </a:r>
+                      <a:pPr indent="0" marL="0">
+                        <a:buNone/>
+                      </a:pPr>
+                      <a:r>
+                        <a:rPr lang="en-US" sz="1150" dirty="0">
+                          <a:solidFill>
+                            <a:srgbClr val="1D1D1F"/>
+                          </a:solidFill>
+                          <a:latin typeface="Inter" pitchFamily="34" charset="0"/>
+                          <a:ea typeface="Inter" pitchFamily="34" charset="-122"/>
+                          <a:cs typeface="Inter" pitchFamily="34" charset="-120"/>
+                        </a:rPr>
+                        <a:t> — kullanıcı bileşeni hiçbir şey çağırmaz</a:t>
+                      </a:r>
+                      <a:endParaRPr lang="en-US" sz="1150" dirty="0">
+                        <a:latin typeface="Inter" charset="0"/>
+                        <a:ea typeface="Inter" charset="0"/>
+                        <a:cs typeface="Inter" charset="0"/>
+                      </a:endParaRPr>
+                    </a:p>
+                  </a:txBody>
+                  <a:tcPr marL="114300" marR="114300" marT="76200" marB="76200" anchor="ctr">
+                    <a:lnL w="6350" cap="flat" cmpd="sng" algn="ctr">
+                      <a:solidFill>
+                        <a:srgbClr val="D8D8DC"/>
+                      </a:solidFill>
+                      <a:prstDash val="solid"/>
+                      <a:round/>
+                      <a:headEnd type="none" w="med" len="med"/>
+                      <a:tailEnd type="none" w="med" len="med"/>
+                    </a:lnL>
+                    <a:lnR w="6350" cap="flat" cmpd="sng" algn="ctr">
+                      <a:solidFill>
+                        <a:srgbClr val="D8D8DC"/>
+                      </a:solidFill>
+                      <a:prstDash val="solid"/>
+                      <a:round/>
+                      <a:headEnd type="none" w="med" len="med"/>
+                      <a:tailEnd type="none" w="med" len="med"/>
+                    </a:lnR>
+                    <a:lnT w="6350" cap="flat" cmpd="sng" algn="ctr">
+                      <a:solidFill>
+                        <a:srgbClr val="D8D8DC"/>
+                      </a:solidFill>
+                      <a:prstDash val="solid"/>
+                      <a:round/>
+                      <a:headEnd type="none" w="med" len="med"/>
+                      <a:tailEnd type="none" w="med" len="med"/>
+                    </a:lnT>
+                    <a:lnB w="6350" cap="flat" cmpd="sng" algn="ctr">
+                      <a:solidFill>
+                        <a:srgbClr val="D8D8DC"/>
+                      </a:solidFill>
+                      <a:prstDash val="solid"/>
+                      <a:round/>
+                      <a:headEnd type="none" w="med" len="med"/>
+                      <a:tailEnd type="none" w="med" len="med"/>
+                    </a:lnB>
+                    <a:solidFill>
+                      <a:srgbClr val="FFFFFF"/>
+                    </a:solidFill>
+                  </a:tcPr>
+                </a:tc>
+              </a:tr>
+              <a:tr h="0">
+                <a:tc>
+                  <a:txBody>
+                    <a:bodyPr/>
+                    <a:lstStyle/>
+                    <a:p>
+                      <a:pPr indent="0" marL="0">
+                        <a:buNone/>
+                      </a:pPr>
+                      <a:r>
+                        <a:rPr lang="en-US" sz="1150" dirty="0">
+                          <a:solidFill>
+                            <a:srgbClr val="1D1D1F"/>
+                          </a:solidFill>
+                          <a:latin typeface="Inter" pitchFamily="34" charset="0"/>
+                          <a:ea typeface="Inter" pitchFamily="34" charset="-122"/>
+                          <a:cs typeface="Inter" pitchFamily="34" charset="-120"/>
+                        </a:rPr>
+                        <a:t>hata sinyali · kırpma · "ne yapmalı"</a:t>
+                      </a:r>
+                      <a:endParaRPr lang="en-US" sz="1150" dirty="0">
+                        <a:latin typeface="Inter" charset="0"/>
+                        <a:ea typeface="Inter" charset="0"/>
+                        <a:cs typeface="Inter" charset="0"/>
+                      </a:endParaRPr>
+                    </a:p>
+                  </a:txBody>
+                  <a:tcPr marL="114300" marR="114300" marT="76200" marB="76200" anchor="ctr">
+                    <a:lnL w="6350" cap="flat" cmpd="sng" algn="ctr">
+                      <a:solidFill>
+                        <a:srgbClr val="D8D8DC"/>
+                      </a:solidFill>
+                      <a:prstDash val="solid"/>
+                      <a:round/>
+                      <a:headEnd type="none" w="med" len="med"/>
+                      <a:tailEnd type="none" w="med" len="med"/>
+                    </a:lnL>
+                    <a:lnR w="6350" cap="flat" cmpd="sng" algn="ctr">
+                      <a:solidFill>
+                        <a:srgbClr val="D8D8DC"/>
+                      </a:solidFill>
+                      <a:prstDash val="solid"/>
+                      <a:round/>
+                      <a:headEnd type="none" w="med" len="med"/>
+                      <a:tailEnd type="none" w="med" len="med"/>
+                    </a:lnR>
+                    <a:lnT w="6350" cap="flat" cmpd="sng" algn="ctr">
+                      <a:solidFill>
+                        <a:srgbClr val="D8D8DC"/>
+                      </a:solidFill>
+                      <a:prstDash val="solid"/>
+                      <a:round/>
+                      <a:headEnd type="none" w="med" len="med"/>
+                      <a:tailEnd type="none" w="med" len="med"/>
+                    </a:lnT>
+                    <a:lnB w="6350" cap="flat" cmpd="sng" algn="ctr">
+                      <a:solidFill>
+                        <a:srgbClr val="D8D8DC"/>
+                      </a:solidFill>
+                      <a:prstDash val="solid"/>
+                      <a:round/>
+                      <a:headEnd type="none" w="med" len="med"/>
+                      <a:tailEnd type="none" w="med" len="med"/>
+                    </a:lnB>
+                    <a:solidFill>
+                      <a:srgbClr val="F5F5F7"/>
+                    </a:solidFill>
+                  </a:tcPr>
+                </a:tc>
+                <a:tc>
+                  <a:txBody>
+                    <a:bodyPr/>
+                    <a:lstStyle/>
+                    <a:p>
+                      <a:pPr indent="0" marL="0">
+                        <a:buNone/>
+                      </a:pPr>
+                      <a:r>
+                        <a:rPr lang="en-US" sz="1150" b="1" dirty="0">
+                          <a:solidFill>
+                            <a:srgbClr val="1D1D1F"/>
+                          </a:solidFill>
+                          <a:latin typeface="Inter" pitchFamily="34" charset="0"/>
+                          <a:ea typeface="Inter" pitchFamily="34" charset="-122"/>
+                          <a:cs typeface="Inter" pitchFamily="34" charset="-120"/>
+                        </a:rPr>
+                        <a:t>SWE-agent · smolagents · Codex</a:t>
+                      </a:r>
+                      <a:endParaRPr lang="en-US" sz="1150" dirty="0">
+                        <a:latin typeface="Inter" charset="0"/>
+                        <a:ea typeface="Inter" charset="0"/>
+                        <a:cs typeface="Inter" charset="0"/>
+                      </a:endParaRPr>
+                    </a:p>
+                  </a:txBody>
+                  <a:tcPr marL="114300" marR="114300" marT="76200" marB="76200" anchor="ctr">
+                    <a:lnL w="6350" cap="flat" cmpd="sng" algn="ctr">
+                      <a:solidFill>
+                        <a:srgbClr val="D8D8DC"/>
+                      </a:solidFill>
+                      <a:prstDash val="solid"/>
+                      <a:round/>
+                      <a:headEnd type="none" w="med" len="med"/>
+                      <a:tailEnd type="none" w="med" len="med"/>
+                    </a:lnL>
+                    <a:lnR w="6350" cap="flat" cmpd="sng" algn="ctr">
+                      <a:solidFill>
+                        <a:srgbClr val="D8D8DC"/>
+                      </a:solidFill>
+                      <a:prstDash val="solid"/>
+                      <a:round/>
+                      <a:headEnd type="none" w="med" len="med"/>
+                      <a:tailEnd type="none" w="med" len="med"/>
+                    </a:lnR>
+                    <a:lnT w="6350" cap="flat" cmpd="sng" algn="ctr">
+                      <a:solidFill>
+                        <a:srgbClr val="D8D8DC"/>
+                      </a:solidFill>
+                      <a:prstDash val="solid"/>
+                      <a:round/>
+                      <a:headEnd type="none" w="med" len="med"/>
+                      <a:tailEnd type="none" w="med" len="med"/>
+                    </a:lnT>
+                    <a:lnB w="6350" cap="flat" cmpd="sng" algn="ctr">
+                      <a:solidFill>
+                        <a:srgbClr val="D8D8DC"/>
+                      </a:solidFill>
+                      <a:prstDash val="solid"/>
+                      <a:round/>
+                      <a:headEnd type="none" w="med" len="med"/>
+                      <a:tailEnd type="none" w="med" len="med"/>
+                    </a:lnB>
+                    <a:solidFill>
+                      <a:srgbClr val="F5F5F7"/>
+                    </a:solidFill>
+                  </a:tcPr>
+                </a:tc>
+              </a:tr>
+              <a:tr h="0">
+                <a:tc>
+                  <a:txBody>
+                    <a:bodyPr/>
+                    <a:lstStyle/>
+                    <a:p>
+                      <a:pPr indent="0" marL="0">
+                        <a:buNone/>
+                      </a:pPr>
+                      <a:r>
+                        <a:rPr lang="en-US" sz="1150" dirty="0">
+                          <a:solidFill>
+                            <a:srgbClr val="1D1D1F"/>
+                          </a:solidFill>
+                          <a:latin typeface="Inter" pitchFamily="34" charset="0"/>
+                          <a:ea typeface="Inter" pitchFamily="34" charset="-122"/>
+                          <a:cs typeface="Inter" pitchFamily="34" charset="-120"/>
+                        </a:rPr>
+                        <a:t>sebep-farkında retry sayacı</a:t>
+                      </a:r>
+                      <a:endParaRPr lang="en-US" sz="1150" dirty="0">
+                        <a:latin typeface="Inter" charset="0"/>
+                        <a:ea typeface="Inter" charset="0"/>
+                        <a:cs typeface="Inter" charset="0"/>
+                      </a:endParaRPr>
+                    </a:p>
+                  </a:txBody>
+                  <a:tcPr marL="114300" marR="114300" marT="76200" marB="76200" anchor="ctr">
+                    <a:lnL w="6350" cap="flat" cmpd="sng" algn="ctr">
+                      <a:solidFill>
+                        <a:srgbClr val="D8D8DC"/>
+                      </a:solidFill>
+                      <a:prstDash val="solid"/>
+                      <a:round/>
+                      <a:headEnd type="none" w="med" len="med"/>
+                      <a:tailEnd type="none" w="med" len="med"/>
+                    </a:lnL>
+                    <a:lnR w="6350" cap="flat" cmpd="sng" algn="ctr">
+                      <a:solidFill>
+                        <a:srgbClr val="D8D8DC"/>
+                      </a:solidFill>
+                      <a:prstDash val="solid"/>
+                      <a:round/>
+                      <a:headEnd type="none" w="med" len="med"/>
+                      <a:tailEnd type="none" w="med" len="med"/>
+                    </a:lnR>
+                    <a:lnT w="6350" cap="flat" cmpd="sng" algn="ctr">
+                      <a:solidFill>
+                        <a:srgbClr val="D8D8DC"/>
+                      </a:solidFill>
+                      <a:prstDash val="solid"/>
+                      <a:round/>
+                      <a:headEnd type="none" w="med" len="med"/>
+                      <a:tailEnd type="none" w="med" len="med"/>
+                    </a:lnT>
+                    <a:lnB w="6350" cap="flat" cmpd="sng" algn="ctr">
+                      <a:solidFill>
+                        <a:srgbClr val="D8D8DC"/>
+                      </a:solidFill>
+                      <a:prstDash val="solid"/>
+                      <a:round/>
+                      <a:headEnd type="none" w="med" len="med"/>
+                      <a:tailEnd type="none" w="med" len="med"/>
+                    </a:lnB>
+                    <a:solidFill>
+                      <a:srgbClr val="FFFFFF"/>
+                    </a:solidFill>
+                  </a:tcPr>
+                </a:tc>
+                <a:tc>
+                  <a:txBody>
+                    <a:bodyPr/>
+                    <a:lstStyle/>
+                    <a:p>
+                      <a:pPr indent="0" marL="0">
+                        <a:buNone/>
+                      </a:pPr>
+                      <a:r>
+                        <a:rPr lang="en-US" sz="1150" b="1" dirty="0">
+                          <a:solidFill>
+                            <a:srgbClr val="1D1D1F"/>
+                          </a:solidFill>
+                          <a:latin typeface="Inter" pitchFamily="34" charset="0"/>
+                          <a:ea typeface="Inter" pitchFamily="34" charset="-122"/>
+                          <a:cs typeface="Inter" pitchFamily="34" charset="-120"/>
+                        </a:rPr>
+                        <a:t>Anthropic `error_code` · Codex `is_likely_sandbox_denied`</a:t>
+                      </a:r>
+                      <a:endParaRPr lang="en-US" sz="1150" dirty="0">
+                        <a:latin typeface="Inter" charset="0"/>
+                        <a:ea typeface="Inter" charset="0"/>
+                        <a:cs typeface="Inter" charset="0"/>
+                      </a:endParaRPr>
+                    </a:p>
+                  </a:txBody>
+                  <a:tcPr marL="114300" marR="114300" marT="76200" marB="76200" anchor="ctr">
+                    <a:lnL w="6350" cap="flat" cmpd="sng" algn="ctr">
+                      <a:solidFill>
+                        <a:srgbClr val="D8D8DC"/>
+                      </a:solidFill>
+                      <a:prstDash val="solid"/>
+                      <a:round/>
+                      <a:headEnd type="none" w="med" len="med"/>
+                      <a:tailEnd type="none" w="med" len="med"/>
+                    </a:lnL>
+                    <a:lnR w="6350" cap="flat" cmpd="sng" algn="ctr">
+                      <a:solidFill>
+                        <a:srgbClr val="D8D8DC"/>
+                      </a:solidFill>
+                      <a:prstDash val="solid"/>
+                      <a:round/>
+                      <a:headEnd type="none" w="med" len="med"/>
+                      <a:tailEnd type="none" w="med" len="med"/>
+                    </a:lnR>
+                    <a:lnT w="6350" cap="flat" cmpd="sng" algn="ctr">
+                      <a:solidFill>
+                        <a:srgbClr val="D8D8DC"/>
+                      </a:solidFill>
+                      <a:prstDash val="solid"/>
+                      <a:round/>
+                      <a:headEnd type="none" w="med" len="med"/>
+                      <a:tailEnd type="none" w="med" len="med"/>
+                    </a:lnT>
+                    <a:lnB w="6350" cap="flat" cmpd="sng" algn="ctr">
+                      <a:solidFill>
+                        <a:srgbClr val="D8D8DC"/>
+                      </a:solidFill>
+                      <a:prstDash val="solid"/>
+                      <a:round/>
+                      <a:headEnd type="none" w="med" len="med"/>
+                      <a:tailEnd type="none" w="med" len="med"/>
+                    </a:lnB>
+                    <a:solidFill>
+                      <a:srgbClr val="FFFFFF"/>
+                    </a:solidFill>
+                  </a:tcPr>
+                </a:tc>
+              </a:tr>
+              <a:tr h="0">
+                <a:tc>
+                  <a:txBody>
+                    <a:bodyPr/>
+                    <a:lstStyle/>
+                    <a:p>
+                      <a:pPr indent="0" marL="0">
+                        <a:buNone/>
+                      </a:pPr>
+                      <a:r>
+                        <a:rPr lang="en-US" sz="1150" b="1" dirty="0">
+                          <a:solidFill>
+                            <a:srgbClr val="1D1D1F"/>
+                          </a:solidFill>
+                          <a:latin typeface="Inter" pitchFamily="34" charset="0"/>
+                          <a:ea typeface="Inter" pitchFamily="34" charset="-122"/>
+                          <a:cs typeface="Inter" pitchFamily="34" charset="-120"/>
+                        </a:rPr>
+                        <a:t>İzolasyon</a:t>
+                      </a:r>
+                      <a:endParaRPr lang="en-US" sz="1150" dirty="0">
+                        <a:latin typeface="Inter" charset="0"/>
+                        <a:ea typeface="Inter" charset="0"/>
+                        <a:cs typeface="Inter" charset="0"/>
+                      </a:endParaRPr>
+                    </a:p>
+                  </a:txBody>
+                  <a:tcPr marL="114300" marR="114300" marT="76200" marB="76200" anchor="ctr">
+                    <a:lnL w="6350" cap="flat" cmpd="sng" algn="ctr">
+                      <a:solidFill>
+                        <a:srgbClr val="D8D8DC"/>
+                      </a:solidFill>
+                      <a:prstDash val="solid"/>
+                      <a:round/>
+                      <a:headEnd type="none" w="med" len="med"/>
+                      <a:tailEnd type="none" w="med" len="med"/>
+                    </a:lnL>
+                    <a:lnR w="6350" cap="flat" cmpd="sng" algn="ctr">
+                      <a:solidFill>
+                        <a:srgbClr val="D8D8DC"/>
+                      </a:solidFill>
+                      <a:prstDash val="solid"/>
+                      <a:round/>
+                      <a:headEnd type="none" w="med" len="med"/>
+                      <a:tailEnd type="none" w="med" len="med"/>
+                    </a:lnR>
+                    <a:lnT w="6350" cap="flat" cmpd="sng" algn="ctr">
+                      <a:solidFill>
+                        <a:srgbClr val="D8D8DC"/>
+                      </a:solidFill>
+                      <a:prstDash val="solid"/>
+                      <a:round/>
+                      <a:headEnd type="none" w="med" len="med"/>
+                      <a:tailEnd type="none" w="med" len="med"/>
+                    </a:lnT>
+                    <a:lnB w="6350" cap="flat" cmpd="sng" algn="ctr">
+                      <a:solidFill>
+                        <a:srgbClr val="D8D8DC"/>
+                      </a:solidFill>
+                      <a:prstDash val="solid"/>
+                      <a:round/>
+                      <a:headEnd type="none" w="med" len="med"/>
+                      <a:tailEnd type="none" w="med" len="med"/>
+                    </a:lnB>
+                    <a:solidFill>
+                      <a:srgbClr val="F5F5F7"/>
+                    </a:solidFill>
+                  </a:tcPr>
+                </a:tc>
+                <a:tc>
+                  <a:txBody>
+                    <a:bodyPr/>
+                    <a:lstStyle/>
+                    <a:p>
+                      <a:pPr indent="0" marL="0">
+                        <a:buNone/>
+                      </a:pPr>
+                      <a:r>
+                        <a:rPr lang="en-US" sz="1150" b="1" dirty="0">
+                          <a:solidFill>
+                            <a:srgbClr val="C0392B"/>
+                          </a:solidFill>
+                          <a:latin typeface="Inter" pitchFamily="34" charset="0"/>
+                          <a:ea typeface="Inter" pitchFamily="34" charset="-122"/>
+                          <a:cs typeface="Inter" pitchFamily="34" charset="-120"/>
+                        </a:rPr>
+                        <a:t>Kimse — bizimki daha zayıf (düz container)</a:t>
+                      </a:r>
+                      <a:endParaRPr lang="en-US" sz="1150" dirty="0">
+                        <a:latin typeface="Inter" charset="0"/>
+                        <a:ea typeface="Inter" charset="0"/>
+                        <a:cs typeface="Inter" charset="0"/>
+                      </a:endParaRPr>
+                    </a:p>
+                  </a:txBody>
+                  <a:tcPr marL="114300" marR="114300" marT="76200" marB="76200" anchor="ctr">
+                    <a:lnL w="6350" cap="flat" cmpd="sng" algn="ctr">
+                      <a:solidFill>
+                        <a:srgbClr val="D8D8DC"/>
+                      </a:solidFill>
+                      <a:prstDash val="solid"/>
+                      <a:round/>
+                      <a:headEnd type="none" w="med" len="med"/>
+                      <a:tailEnd type="none" w="med" len="med"/>
+                    </a:lnL>
+                    <a:lnR w="6350" cap="flat" cmpd="sng" algn="ctr">
+                      <a:solidFill>
+                        <a:srgbClr val="D8D8DC"/>
+                      </a:solidFill>
+                      <a:prstDash val="solid"/>
+                      <a:round/>
+                      <a:headEnd type="none" w="med" len="med"/>
+                      <a:tailEnd type="none" w="med" len="med"/>
+                    </a:lnR>
+                    <a:lnT w="6350" cap="flat" cmpd="sng" algn="ctr">
+                      <a:solidFill>
+                        <a:srgbClr val="D8D8DC"/>
+                      </a:solidFill>
+                      <a:prstDash val="solid"/>
+                      <a:round/>
+                      <a:headEnd type="none" w="med" len="med"/>
+                      <a:tailEnd type="none" w="med" len="med"/>
+                    </a:lnT>
+                    <a:lnB w="6350" cap="flat" cmpd="sng" algn="ctr">
+                      <a:solidFill>
+                        <a:srgbClr val="D8D8DC"/>
+                      </a:solidFill>
+                      <a:prstDash val="solid"/>
+                      <a:round/>
+                      <a:headEnd type="none" w="med" len="med"/>
+                      <a:tailEnd type="none" w="med" len="med"/>
+                    </a:lnB>
+                    <a:solidFill>
+                      <a:srgbClr val="F5F5F7"/>
+                    </a:solidFill>
+                  </a:tcPr>
+                </a:tc>
+              </a:tr>
+            </a:tbl>
+          </a:graphicData>
+        </a:graphic>
+      </p:graphicFrame>
+      <p:sp>
+        <p:nvSpPr>
+          <p:cNvPr id="6" name="Shape 3"/>
+          <p:cNvSpPr/>
+          <p:nvPr/>
+        </p:nvSpPr>
+        <p:spPr>
+          <a:xfrm>
+            <a:off x="566928" y="5522976"/>
             <a:ext cx="11057839" cy="448056"/>
           </a:xfrm>
           <a:prstGeom prst="rect">
@@ -10462,7 +13117,7 @@
         </p:nvSpPr>
         <p:spPr>
           <a:xfrm>
-            <a:off x="713232" y="4956048"/>
+            <a:off x="713232" y="5577840"/>
             <a:ext cx="10765231" cy="320040"/>
           </a:xfrm>
           <a:prstGeom prst="rect">
@@ -10585,7 +13240,7 @@
                 <a:ea typeface="JetBrains Mono" pitchFamily="34" charset="-122"/>
                 <a:cs typeface="JetBrains Mono" pitchFamily="34" charset="-120"/>
               </a:rPr>
-              <a:t>10 / 12</a:t>
+              <a:t>11 / 13</a:t>
             </a:r>
             <a:endParaRPr lang="en-US" sz="900" dirty="0"/>
           </a:p>
@@ -10599,9 +13254,9 @@
 </p:sld>
 </file>
 
-<file path=ppt/slides/slide14.xml><?xml version="1.0" encoding="utf-8"?>
+<file path=ppt/slides/slide16.xml><?xml version="1.0" encoding="utf-8"?>
 <p:sld xmlns:a="http://schemas.openxmlformats.org/drawingml/2006/main" xmlns:r="http://schemas.openxmlformats.org/officeDocument/2006/relationships" xmlns:p="http://schemas.openxmlformats.org/presentationml/2006/main">
-  <p:cSld name="Slide 14">
+  <p:cSld name="Slide 16">
     <p:bg>
       <p:bgPr>
         <a:solidFill>
@@ -10656,7 +13311,7 @@
                 <a:ea typeface="Inter" pitchFamily="34" charset="-122"/>
                 <a:cs typeface="Inter" pitchFamily="34" charset="-120"/>
               </a:rPr>
-              <a:t>SAYFA 11</a:t>
+              <a:t>SAYFA 12</a:t>
             </a:r>
             <a:endParaRPr lang="en-US" sz="950" dirty="0"/>
           </a:p>
@@ -10796,7 +13451,7 @@
       </p:sp>
       <p:graphicFrame>
         <p:nvGraphicFramePr>
-          <p:cNvPr id="15" name="Table 0"/>
+          <p:cNvPr id="17" name="Table 0"/>
           <p:cNvGraphicFramePr>
             <a:graphicFrameLocks noGrp="1"/>
           </p:cNvGraphicFramePr>
@@ -11941,7 +14596,7 @@
                 <a:ea typeface="JetBrains Mono" pitchFamily="34" charset="-122"/>
                 <a:cs typeface="JetBrains Mono" pitchFamily="34" charset="-120"/>
               </a:rPr>
-              <a:t>11 / 12</a:t>
+              <a:t>12 / 13</a:t>
             </a:r>
             <a:endParaRPr lang="en-US" sz="900" dirty="0"/>
           </a:p>
@@ -11955,9 +14610,9 @@
 </p:sld>
 </file>
 
-<file path=ppt/slides/slide15.xml><?xml version="1.0" encoding="utf-8"?>
+<file path=ppt/slides/slide17.xml><?xml version="1.0" encoding="utf-8"?>
 <p:sld xmlns:a="http://schemas.openxmlformats.org/drawingml/2006/main" xmlns:r="http://schemas.openxmlformats.org/officeDocument/2006/relationships" xmlns:p="http://schemas.openxmlformats.org/presentationml/2006/main">
-  <p:cSld name="Slide 15">
+  <p:cSld name="Slide 17">
     <p:bg>
       <p:bgPr>
         <a:solidFill>
@@ -12012,7 +14667,7 @@
                 <a:ea typeface="Inter" pitchFamily="34" charset="-122"/>
                 <a:cs typeface="Inter" pitchFamily="34" charset="-120"/>
               </a:rPr>
-              <a:t>SAYFA 12</a:t>
+              <a:t>SAYFA 13</a:t>
             </a:r>
             <a:endParaRPr lang="en-US" sz="950" dirty="0"/>
           </a:p>
@@ -12079,7 +14734,7 @@
       </p:sp>
       <p:graphicFrame>
         <p:nvGraphicFramePr>
-          <p:cNvPr id="16" name="Table 0"/>
+          <p:cNvPr id="18" name="Table 0"/>
           <p:cNvGraphicFramePr>
             <a:graphicFrameLocks noGrp="1"/>
           </p:cNvGraphicFramePr>
@@ -13331,7 +15986,7 @@
                 <a:ea typeface="JetBrains Mono" pitchFamily="34" charset="-122"/>
                 <a:cs typeface="JetBrains Mono" pitchFamily="34" charset="-120"/>
               </a:rPr>
-              <a:t>12 / 12</a:t>
+              <a:t>13 / 13</a:t>
             </a:r>
             <a:endParaRPr lang="en-US" sz="900" dirty="0"/>
           </a:p>
@@ -14458,7 +17113,7 @@
                 <a:ea typeface="JetBrains Mono" pitchFamily="34" charset="-122"/>
                 <a:cs typeface="JetBrains Mono" pitchFamily="34" charset="-120"/>
               </a:rPr>
-              <a:t>1 / 12</a:t>
+              <a:t>1 / 13</a:t>
             </a:r>
             <a:endParaRPr lang="en-US" sz="900" dirty="0"/>
           </a:p>
@@ -14811,7 +17466,7 @@
                 <a:ea typeface="JetBrains Mono" pitchFamily="34" charset="-122"/>
                 <a:cs typeface="JetBrains Mono" pitchFamily="34" charset="-120"/>
               </a:rPr>
-              <a:t>2 / 12</a:t>
+              <a:t>2 / 13</a:t>
             </a:r>
             <a:endParaRPr lang="en-US" sz="900" dirty="0"/>
           </a:p>
@@ -15801,7 +18456,7 @@
                 <a:ea typeface="JetBrains Mono" pitchFamily="34" charset="-122"/>
                 <a:cs typeface="JetBrains Mono" pitchFamily="34" charset="-120"/>
               </a:rPr>
-              <a:t>2 / 12</a:t>
+              <a:t>2 / 13</a:t>
             </a:r>
             <a:endParaRPr lang="en-US" sz="900" dirty="0"/>
           </a:p>
@@ -16154,7 +18809,7 @@
                 <a:ea typeface="JetBrains Mono" pitchFamily="34" charset="-122"/>
                 <a:cs typeface="JetBrains Mono" pitchFamily="34" charset="-120"/>
               </a:rPr>
-              <a:t>3 / 12</a:t>
+              <a:t>3 / 13</a:t>
             </a:r>
             <a:endParaRPr lang="en-US" sz="900" dirty="0"/>
           </a:p>
@@ -18951,7 +21606,7 @@
                 <a:ea typeface="JetBrains Mono" pitchFamily="34" charset="-122"/>
                 <a:cs typeface="JetBrains Mono" pitchFamily="34" charset="-120"/>
               </a:rPr>
-              <a:t>4 / 12</a:t>
+              <a:t>4 / 13</a:t>
             </a:r>
             <a:endParaRPr lang="en-US" sz="900" dirty="0"/>
           </a:p>
@@ -19336,7 +21991,7 @@
                 <a:ea typeface="JetBrains Mono" pitchFamily="34" charset="-122"/>
                 <a:cs typeface="JetBrains Mono" pitchFamily="34" charset="-120"/>
               </a:rPr>
-              <a:t>4 / 12</a:t>
+              <a:t>4 / 13</a:t>
             </a:r>
             <a:endParaRPr lang="en-US" sz="900" dirty="0"/>
           </a:p>
@@ -19661,7 +22316,7 @@
                 <a:ea typeface="JetBrains Mono" pitchFamily="34" charset="-122"/>
                 <a:cs typeface="JetBrains Mono" pitchFamily="34" charset="-120"/>
               </a:rPr>
-              <a:t>5 / 12</a:t>
+              <a:t>5 / 13</a:t>
             </a:r>
             <a:endParaRPr lang="en-US" sz="900" dirty="0"/>
           </a:p>
@@ -20777,7 +23432,7 @@
                 <a:ea typeface="JetBrains Mono" pitchFamily="34" charset="-122"/>
                 <a:cs typeface="JetBrains Mono" pitchFamily="34" charset="-120"/>
               </a:rPr>
-              <a:t>6 / 12</a:t>
+              <a:t>6 / 13</a:t>
             </a:r>
             <a:endParaRPr lang="en-US" sz="900" dirty="0"/>
           </a:p>
